--- a/output/wordlabs-trust-3day.pptx
+++ b/output/wordlabs-trust-3day.pptx
@@ -5622,7 +5622,7 @@
                 <a:ea typeface="Trebuchet MS" pitchFamily="34" charset="-122"/>
                 <a:cs typeface="Trebuchet MS" pitchFamily="34" charset="-120"/>
               </a:rPr>
-              <a:t>0</a:t>
+              <a:t>1</a:t>
             </a:r>
             <a:pPr algn="ctr" indent="0" marL="0">
               <a:buNone/>
@@ -6040,7 +6040,7 @@
                 <a:ea typeface="Calibri" pitchFamily="34" charset="-122"/>
                 <a:cs typeface="Calibri" pitchFamily="34" charset="-120"/>
               </a:rPr>
-              <a:t>We </a:t>
+              <a:t>Because he had always been </a:t>
             </a:r>
             <a:pPr algn="l" indent="0" marL="0">
               <a:buNone/>
@@ -6057,7 +6057,7 @@
                 <a:ea typeface="Calibri" pitchFamily="34" charset="-122"/>
                 <a:cs typeface="Calibri" pitchFamily="34" charset="-120"/>
               </a:rPr>
-              <a:t>trusted</a:t>
+              <a:t>trustworthy</a:t>
             </a:r>
             <a:pPr algn="l" indent="0" marL="0">
               <a:buNone/>
@@ -6071,7 +6071,7 @@
                 <a:ea typeface="Calibri" pitchFamily="34" charset="-122"/>
                 <a:cs typeface="Calibri" pitchFamily="34" charset="-120"/>
               </a:rPr>
-              <a:t> the </a:t>
+              <a:t>, his teacher </a:t>
             </a:r>
             <a:pPr algn="l" indent="0" marL="0">
               <a:buNone/>
@@ -6088,7 +6088,7 @@
                 <a:ea typeface="Calibri" pitchFamily="34" charset="-122"/>
                 <a:cs typeface="Calibri" pitchFamily="34" charset="-120"/>
               </a:rPr>
-              <a:t>trustworthy</a:t>
+              <a:t>trusted</a:t>
             </a:r>
             <a:pPr algn="l" indent="0" marL="0">
               <a:buNone/>
@@ -6102,7 +6102,7 @@
                 <a:ea typeface="Calibri" pitchFamily="34" charset="-122"/>
                 <a:cs typeface="Calibri" pitchFamily="34" charset="-120"/>
               </a:rPr>
-              <a:t> guide to lead us safely through the bush.</a:t>
+              <a:t> him to look after the class pet.</a:t>
             </a:r>
             <a:endParaRPr lang="en-US" sz="1800" dirty="0"/>
           </a:p>
@@ -6257,7 +6257,7 @@
                 <a:ea typeface="Trebuchet MS" pitchFamily="34" charset="-122"/>
                 <a:cs typeface="Trebuchet MS" pitchFamily="34" charset="-120"/>
               </a:rPr>
-              <a:t>trusted</a:t>
+              <a:t>trustworthy</a:t>
             </a:r>
             <a:endParaRPr lang="en-US" sz="1400" dirty="0"/>
           </a:p>
@@ -6385,7 +6385,7 @@
                 <a:ea typeface="Trebuchet MS" pitchFamily="34" charset="-122"/>
                 <a:cs typeface="Trebuchet MS" pitchFamily="34" charset="-120"/>
               </a:rPr>
-              <a:t>trustworthy</a:t>
+              <a:t>trusted</a:t>
             </a:r>
             <a:endParaRPr lang="en-US" sz="1400" dirty="0"/>
           </a:p>
@@ -6855,7 +6855,7 @@
                 <a:ea typeface="Trebuchet MS" pitchFamily="34" charset="-122"/>
                 <a:cs typeface="Trebuchet MS" pitchFamily="34" charset="-120"/>
               </a:rPr>
-              <a:t>trusted</a:t>
+              <a:t>trustworthy</a:t>
             </a:r>
             <a:endParaRPr lang="en-US" sz="2800" dirty="0"/>
           </a:p>
@@ -7682,7 +7682,7 @@
                 <a:ea typeface="Trebuchet MS" pitchFamily="34" charset="-122"/>
                 <a:cs typeface="Trebuchet MS" pitchFamily="34" charset="-120"/>
               </a:rPr>
-              <a:t>trusted</a:t>
+              <a:t>trustworthy</a:t>
             </a:r>
             <a:endParaRPr lang="en-US" sz="2800" dirty="0"/>
           </a:p>
@@ -7933,7 +7933,7 @@
                 <a:ea typeface="Trebuchet MS" pitchFamily="34" charset="-122"/>
                 <a:cs typeface="Trebuchet MS" pitchFamily="34" charset="-120"/>
               </a:rPr>
-              <a:t>ed</a:t>
+              <a:t>worthy</a:t>
             </a:r>
             <a:endParaRPr lang="en-US" sz="1300" dirty="0"/>
           </a:p>
@@ -7972,7 +7972,7 @@
                 <a:ea typeface="Calibri" pitchFamily="34" charset="-122"/>
                 <a:cs typeface="Calibri" pitchFamily="34" charset="-120"/>
               </a:rPr>
-              <a:t>past tense</a:t>
+              <a:t>deserving of</a:t>
             </a:r>
             <a:endParaRPr lang="en-US" sz="850" dirty="0"/>
           </a:p>
@@ -8667,7 +8667,7 @@
                 <a:ea typeface="Trebuchet MS" pitchFamily="34" charset="-122"/>
                 <a:cs typeface="Trebuchet MS" pitchFamily="34" charset="-120"/>
               </a:rPr>
-              <a:t>trusted</a:t>
+              <a:t>trustworthy</a:t>
             </a:r>
             <a:endParaRPr lang="en-US" sz="2800" dirty="0"/>
           </a:p>
@@ -8918,7 +8918,7 @@
                 <a:ea typeface="Trebuchet MS" pitchFamily="34" charset="-122"/>
                 <a:cs typeface="Trebuchet MS" pitchFamily="34" charset="-120"/>
               </a:rPr>
-              <a:t>ed</a:t>
+              <a:t>worthy</a:t>
             </a:r>
             <a:endParaRPr lang="en-US" sz="1300" dirty="0"/>
           </a:p>
@@ -8957,7 +8957,7 @@
                 <a:ea typeface="Calibri" pitchFamily="34" charset="-122"/>
                 <a:cs typeface="Calibri" pitchFamily="34" charset="-120"/>
               </a:rPr>
-              <a:t>past tense</a:t>
+              <a:t>deserving of</a:t>
             </a:r>
             <a:endParaRPr lang="en-US" sz="850" dirty="0"/>
           </a:p>
@@ -9064,7 +9064,7 @@
         </p:nvSpPr>
         <p:spPr>
           <a:xfrm>
-            <a:off x="2999232" y="3364992"/>
+            <a:off x="2313432" y="3364992"/>
             <a:ext cx="1645920" cy="475488"/>
           </a:xfrm>
           <a:prstGeom prst="rect">
@@ -9091,7 +9091,7 @@
         </p:nvSpPr>
         <p:spPr>
           <a:xfrm>
-            <a:off x="2999232" y="3364992"/>
+            <a:off x="2313432" y="3364992"/>
             <a:ext cx="1645920" cy="475488"/>
           </a:xfrm>
           <a:prstGeom prst="rect">
@@ -9130,8 +9130,8 @@
         </p:nvSpPr>
         <p:spPr>
           <a:xfrm>
-            <a:off x="4645152" y="3364992"/>
-            <a:ext cx="1097280" cy="475488"/>
+            <a:off x="3959352" y="3364992"/>
+            <a:ext cx="411480" cy="475488"/>
           </a:xfrm>
           <a:prstGeom prst="rect">
             <a:avLst/>
@@ -9169,7 +9169,7 @@
         </p:nvSpPr>
         <p:spPr>
           <a:xfrm>
-            <a:off x="5742432" y="3364992"/>
+            <a:off x="4370832" y="3364992"/>
             <a:ext cx="1645920" cy="475488"/>
           </a:xfrm>
           <a:prstGeom prst="rect">
@@ -9196,7 +9196,7 @@
         </p:nvSpPr>
         <p:spPr>
           <a:xfrm>
-            <a:off x="5742432" y="3364992"/>
+            <a:off x="4370832" y="3364992"/>
             <a:ext cx="1645920" cy="475488"/>
           </a:xfrm>
           <a:prstGeom prst="rect">
@@ -9221,7 +9221,7 @@
                 <a:ea typeface="Trebuchet MS" pitchFamily="34" charset="-122"/>
                 <a:cs typeface="Trebuchet MS" pitchFamily="34" charset="-120"/>
               </a:rPr>
-              <a:t>ed</a:t>
+              <a:t>wor</a:t>
             </a:r>
             <a:endParaRPr lang="en-US" sz="1400" dirty="0"/>
           </a:p>
@@ -9229,7 +9229,112 @@
       </p:sp>
       <p:sp>
         <p:nvSpPr>
-          <p:cNvPr id="30" name="Shape 28"/>
+          <p:cNvPr id="30" name="Text 28"/>
+          <p:cNvSpPr/>
+          <p:nvPr/>
+        </p:nvSpPr>
+        <p:spPr>
+          <a:xfrm>
+            <a:off x="6016752" y="3364992"/>
+            <a:ext cx="411480" cy="475488"/>
+          </a:xfrm>
+          <a:prstGeom prst="rect">
+            <a:avLst/>
+          </a:prstGeom>
+          <a:noFill/>
+          <a:ln/>
+        </p:spPr>
+        <p:txBody>
+          <a:bodyPr wrap="square" lIns="0" tIns="0" rIns="0" bIns="0" rtlCol="0" anchor="ctr"/>
+          <a:lstStyle/>
+          <a:p>
+            <a:pPr algn="ctr" indent="0" marL="0">
+              <a:buNone/>
+            </a:pPr>
+            <a:r>
+              <a:rPr lang="en-US" sz="1600" b="1" dirty="0">
+                <a:solidFill>
+                  <a:srgbClr val="0D9488"/>
+                </a:solidFill>
+                <a:latin typeface="Trebuchet MS" pitchFamily="34" charset="0"/>
+                <a:ea typeface="Trebuchet MS" pitchFamily="34" charset="-122"/>
+                <a:cs typeface="Trebuchet MS" pitchFamily="34" charset="-120"/>
+              </a:rPr>
+              <a:t>·</a:t>
+            </a:r>
+            <a:endParaRPr lang="en-US" sz="1600" dirty="0"/>
+          </a:p>
+        </p:txBody>
+      </p:sp>
+      <p:sp>
+        <p:nvSpPr>
+          <p:cNvPr id="31" name="Shape 29"/>
+          <p:cNvSpPr/>
+          <p:nvPr/>
+        </p:nvSpPr>
+        <p:spPr>
+          <a:xfrm>
+            <a:off x="6428232" y="3364992"/>
+            <a:ext cx="1645920" cy="475488"/>
+          </a:xfrm>
+          <a:prstGeom prst="rect">
+            <a:avLst>
+              <a:gd name="adj" fmla="val 9615"/>
+            </a:avLst>
+          </a:prstGeom>
+          <a:solidFill>
+            <a:srgbClr val="FFFFFF"/>
+          </a:solidFill>
+          <a:ln w="12700">
+            <a:solidFill>
+              <a:srgbClr val="0D9488"/>
+            </a:solidFill>
+            <a:prstDash val="solid"/>
+          </a:ln>
+        </p:spPr>
+      </p:sp>
+      <p:sp>
+        <p:nvSpPr>
+          <p:cNvPr id="32" name="Text 30"/>
+          <p:cNvSpPr/>
+          <p:nvPr/>
+        </p:nvSpPr>
+        <p:spPr>
+          <a:xfrm>
+            <a:off x="6428232" y="3364992"/>
+            <a:ext cx="1645920" cy="475488"/>
+          </a:xfrm>
+          <a:prstGeom prst="rect">
+            <a:avLst/>
+          </a:prstGeom>
+          <a:noFill/>
+          <a:ln/>
+        </p:spPr>
+        <p:txBody>
+          <a:bodyPr wrap="square" lIns="0" tIns="0" rIns="0" bIns="0" rtlCol="0" anchor="ctr"/>
+          <a:lstStyle/>
+          <a:p>
+            <a:pPr algn="ctr" indent="0" marL="0">
+              <a:buNone/>
+            </a:pPr>
+            <a:r>
+              <a:rPr lang="en-US" sz="1400" b="1" dirty="0">
+                <a:solidFill>
+                  <a:srgbClr val="0D9488"/>
+                </a:solidFill>
+                <a:latin typeface="Trebuchet MS" pitchFamily="34" charset="0"/>
+                <a:ea typeface="Trebuchet MS" pitchFamily="34" charset="-122"/>
+                <a:cs typeface="Trebuchet MS" pitchFamily="34" charset="-120"/>
+              </a:rPr>
+              <a:t>thy</a:t>
+            </a:r>
+            <a:endParaRPr lang="en-US" sz="1400" dirty="0"/>
+          </a:p>
+        </p:txBody>
+      </p:sp>
+      <p:sp>
+        <p:nvSpPr>
+          <p:cNvPr id="33" name="Shape 31"/>
           <p:cNvSpPr/>
           <p:nvPr/>
         </p:nvSpPr>
@@ -9256,7 +9361,7 @@
       </p:sp>
       <p:sp>
         <p:nvSpPr>
-          <p:cNvPr id="31" name="Text 29"/>
+          <p:cNvPr id="34" name="Text 32"/>
           <p:cNvSpPr/>
           <p:nvPr/>
         </p:nvSpPr>
@@ -9295,7 +9400,7 @@
       </p:sp>
       <p:sp>
         <p:nvSpPr>
-          <p:cNvPr id="32" name="Shape 30"/>
+          <p:cNvPr id="35" name="Shape 33"/>
           <p:cNvSpPr/>
           <p:nvPr/>
         </p:nvSpPr>
@@ -9322,7 +9427,7 @@
       </p:sp>
       <p:sp>
         <p:nvSpPr>
-          <p:cNvPr id="33" name="Text 31"/>
+          <p:cNvPr id="36" name="Text 34"/>
           <p:cNvSpPr/>
           <p:nvPr/>
         </p:nvSpPr>
@@ -9784,7 +9889,7 @@
                 <a:ea typeface="Trebuchet MS" pitchFamily="34" charset="-122"/>
                 <a:cs typeface="Trebuchet MS" pitchFamily="34" charset="-120"/>
               </a:rPr>
-              <a:t>trusted</a:t>
+              <a:t>trustworthy</a:t>
             </a:r>
             <a:endParaRPr lang="en-US" sz="2800" dirty="0"/>
           </a:p>
@@ -10035,7 +10140,7 @@
                 <a:ea typeface="Trebuchet MS" pitchFamily="34" charset="-122"/>
                 <a:cs typeface="Trebuchet MS" pitchFamily="34" charset="-120"/>
               </a:rPr>
-              <a:t>ed</a:t>
+              <a:t>worthy</a:t>
             </a:r>
             <a:endParaRPr lang="en-US" sz="1300" dirty="0"/>
           </a:p>
@@ -10074,7 +10179,7 @@
                 <a:ea typeface="Calibri" pitchFamily="34" charset="-122"/>
                 <a:cs typeface="Calibri" pitchFamily="34" charset="-120"/>
               </a:rPr>
-              <a:t>past tense</a:t>
+              <a:t>deserving of</a:t>
             </a:r>
             <a:endParaRPr lang="en-US" sz="850" dirty="0"/>
           </a:p>
@@ -10181,7 +10286,7 @@
         </p:nvSpPr>
         <p:spPr>
           <a:xfrm>
-            <a:off x="2999232" y="3364992"/>
+            <a:off x="2313432" y="3364992"/>
             <a:ext cx="1645920" cy="475488"/>
           </a:xfrm>
           <a:prstGeom prst="rect">
@@ -10208,7 +10313,7 @@
         </p:nvSpPr>
         <p:spPr>
           <a:xfrm>
-            <a:off x="2999232" y="3364992"/>
+            <a:off x="2313432" y="3364992"/>
             <a:ext cx="1645920" cy="475488"/>
           </a:xfrm>
           <a:prstGeom prst="rect">
@@ -10247,8 +10352,8 @@
         </p:nvSpPr>
         <p:spPr>
           <a:xfrm>
-            <a:off x="4645152" y="3364992"/>
-            <a:ext cx="1097280" cy="475488"/>
+            <a:off x="3959352" y="3364992"/>
+            <a:ext cx="411480" cy="475488"/>
           </a:xfrm>
           <a:prstGeom prst="rect">
             <a:avLst/>
@@ -10286,7 +10391,7 @@
         </p:nvSpPr>
         <p:spPr>
           <a:xfrm>
-            <a:off x="5742432" y="3364992"/>
+            <a:off x="4370832" y="3364992"/>
             <a:ext cx="1645920" cy="475488"/>
           </a:xfrm>
           <a:prstGeom prst="rect">
@@ -10313,7 +10418,7 @@
         </p:nvSpPr>
         <p:spPr>
           <a:xfrm>
-            <a:off x="5742432" y="3364992"/>
+            <a:off x="4370832" y="3364992"/>
             <a:ext cx="1645920" cy="475488"/>
           </a:xfrm>
           <a:prstGeom prst="rect">
@@ -10338,7 +10443,7 @@
                 <a:ea typeface="Trebuchet MS" pitchFamily="34" charset="-122"/>
                 <a:cs typeface="Trebuchet MS" pitchFamily="34" charset="-120"/>
               </a:rPr>
-              <a:t>ed</a:t>
+              <a:t>wor</a:t>
             </a:r>
             <a:endParaRPr lang="en-US" sz="1400" dirty="0"/>
           </a:p>
@@ -10346,7 +10451,112 @@
       </p:sp>
       <p:sp>
         <p:nvSpPr>
-          <p:cNvPr id="30" name="Shape 28"/>
+          <p:cNvPr id="30" name="Text 28"/>
+          <p:cNvSpPr/>
+          <p:nvPr/>
+        </p:nvSpPr>
+        <p:spPr>
+          <a:xfrm>
+            <a:off x="6016752" y="3364992"/>
+            <a:ext cx="411480" cy="475488"/>
+          </a:xfrm>
+          <a:prstGeom prst="rect">
+            <a:avLst/>
+          </a:prstGeom>
+          <a:noFill/>
+          <a:ln/>
+        </p:spPr>
+        <p:txBody>
+          <a:bodyPr wrap="square" lIns="0" tIns="0" rIns="0" bIns="0" rtlCol="0" anchor="ctr"/>
+          <a:lstStyle/>
+          <a:p>
+            <a:pPr algn="ctr" indent="0" marL="0">
+              <a:buNone/>
+            </a:pPr>
+            <a:r>
+              <a:rPr lang="en-US" sz="1600" b="1" dirty="0">
+                <a:solidFill>
+                  <a:srgbClr val="0D9488"/>
+                </a:solidFill>
+                <a:latin typeface="Trebuchet MS" pitchFamily="34" charset="0"/>
+                <a:ea typeface="Trebuchet MS" pitchFamily="34" charset="-122"/>
+                <a:cs typeface="Trebuchet MS" pitchFamily="34" charset="-120"/>
+              </a:rPr>
+              <a:t>·</a:t>
+            </a:r>
+            <a:endParaRPr lang="en-US" sz="1600" dirty="0"/>
+          </a:p>
+        </p:txBody>
+      </p:sp>
+      <p:sp>
+        <p:nvSpPr>
+          <p:cNvPr id="31" name="Shape 29"/>
+          <p:cNvSpPr/>
+          <p:nvPr/>
+        </p:nvSpPr>
+        <p:spPr>
+          <a:xfrm>
+            <a:off x="6428232" y="3364992"/>
+            <a:ext cx="1645920" cy="475488"/>
+          </a:xfrm>
+          <a:prstGeom prst="rect">
+            <a:avLst>
+              <a:gd name="adj" fmla="val 9615"/>
+            </a:avLst>
+          </a:prstGeom>
+          <a:solidFill>
+            <a:srgbClr val="FFFFFF"/>
+          </a:solidFill>
+          <a:ln w="12700">
+            <a:solidFill>
+              <a:srgbClr val="0D9488"/>
+            </a:solidFill>
+            <a:prstDash val="solid"/>
+          </a:ln>
+        </p:spPr>
+      </p:sp>
+      <p:sp>
+        <p:nvSpPr>
+          <p:cNvPr id="32" name="Text 30"/>
+          <p:cNvSpPr/>
+          <p:nvPr/>
+        </p:nvSpPr>
+        <p:spPr>
+          <a:xfrm>
+            <a:off x="6428232" y="3364992"/>
+            <a:ext cx="1645920" cy="475488"/>
+          </a:xfrm>
+          <a:prstGeom prst="rect">
+            <a:avLst/>
+          </a:prstGeom>
+          <a:noFill/>
+          <a:ln/>
+        </p:spPr>
+        <p:txBody>
+          <a:bodyPr wrap="square" lIns="0" tIns="0" rIns="0" bIns="0" rtlCol="0" anchor="ctr"/>
+          <a:lstStyle/>
+          <a:p>
+            <a:pPr algn="ctr" indent="0" marL="0">
+              <a:buNone/>
+            </a:pPr>
+            <a:r>
+              <a:rPr lang="en-US" sz="1400" b="1" dirty="0">
+                <a:solidFill>
+                  <a:srgbClr val="0D9488"/>
+                </a:solidFill>
+                <a:latin typeface="Trebuchet MS" pitchFamily="34" charset="0"/>
+                <a:ea typeface="Trebuchet MS" pitchFamily="34" charset="-122"/>
+                <a:cs typeface="Trebuchet MS" pitchFamily="34" charset="-120"/>
+              </a:rPr>
+              <a:t>thy</a:t>
+            </a:r>
+            <a:endParaRPr lang="en-US" sz="1400" dirty="0"/>
+          </a:p>
+        </p:txBody>
+      </p:sp>
+      <p:sp>
+        <p:nvSpPr>
+          <p:cNvPr id="33" name="Shape 31"/>
           <p:cNvSpPr/>
           <p:nvPr/>
         </p:nvSpPr>
@@ -10373,7 +10583,7 @@
       </p:sp>
       <p:sp>
         <p:nvSpPr>
-          <p:cNvPr id="31" name="Text 29"/>
+          <p:cNvPr id="34" name="Text 32"/>
           <p:cNvSpPr/>
           <p:nvPr/>
         </p:nvSpPr>
@@ -10412,7 +10622,7 @@
       </p:sp>
       <p:sp>
         <p:nvSpPr>
-          <p:cNvPr id="32" name="Shape 30"/>
+          <p:cNvPr id="35" name="Shape 33"/>
           <p:cNvSpPr/>
           <p:nvPr/>
         </p:nvSpPr>
@@ -10439,14 +10649,14 @@
       </p:sp>
       <p:sp>
         <p:nvSpPr>
-          <p:cNvPr id="33" name="Shape 31"/>
-          <p:cNvSpPr/>
-          <p:nvPr/>
-        </p:nvSpPr>
-        <p:spPr>
-          <a:xfrm>
-            <a:off x="2124837" y="4169664"/>
-            <a:ext cx="685800" cy="475488"/>
+          <p:cNvPr id="36" name="Shape 34"/>
+          <p:cNvSpPr/>
+          <p:nvPr/>
+        </p:nvSpPr>
+        <p:spPr>
+          <a:xfrm>
+            <a:off x="1951330" y="4169664"/>
+            <a:ext cx="676656" cy="475488"/>
           </a:xfrm>
           <a:prstGeom prst="rect">
             <a:avLst>
@@ -10466,14 +10676,14 @@
       </p:sp>
       <p:sp>
         <p:nvSpPr>
-          <p:cNvPr id="34" name="Text 32"/>
-          <p:cNvSpPr/>
-          <p:nvPr/>
-        </p:nvSpPr>
-        <p:spPr>
-          <a:xfrm>
-            <a:off x="2124837" y="4169664"/>
-            <a:ext cx="685800" cy="475488"/>
+          <p:cNvPr id="37" name="Text 35"/>
+          <p:cNvSpPr/>
+          <p:nvPr/>
+        </p:nvSpPr>
+        <p:spPr>
+          <a:xfrm>
+            <a:off x="1951330" y="4169664"/>
+            <a:ext cx="676656" cy="475488"/>
           </a:xfrm>
           <a:prstGeom prst="rect">
             <a:avLst/>
@@ -10505,14 +10715,14 @@
       </p:sp>
       <p:sp>
         <p:nvSpPr>
-          <p:cNvPr id="35" name="Shape 33"/>
-          <p:cNvSpPr/>
-          <p:nvPr/>
-        </p:nvSpPr>
-        <p:spPr>
-          <a:xfrm>
-            <a:off x="3033522" y="4169664"/>
-            <a:ext cx="685800" cy="475488"/>
+          <p:cNvPr id="38" name="Shape 36"/>
+          <p:cNvSpPr/>
+          <p:nvPr/>
+        </p:nvSpPr>
+        <p:spPr>
+          <a:xfrm>
+            <a:off x="2677363" y="4169664"/>
+            <a:ext cx="676656" cy="475488"/>
           </a:xfrm>
           <a:prstGeom prst="rect">
             <a:avLst>
@@ -10532,14 +10742,14 @@
       </p:sp>
       <p:sp>
         <p:nvSpPr>
-          <p:cNvPr id="36" name="Text 34"/>
-          <p:cNvSpPr/>
-          <p:nvPr/>
-        </p:nvSpPr>
-        <p:spPr>
-          <a:xfrm>
-            <a:off x="3033522" y="4169664"/>
-            <a:ext cx="685800" cy="475488"/>
+          <p:cNvPr id="39" name="Text 37"/>
+          <p:cNvSpPr/>
+          <p:nvPr/>
+        </p:nvSpPr>
+        <p:spPr>
+          <a:xfrm>
+            <a:off x="2677363" y="4169664"/>
+            <a:ext cx="676656" cy="475488"/>
           </a:xfrm>
           <a:prstGeom prst="rect">
             <a:avLst/>
@@ -10571,14 +10781,14 @@
       </p:sp>
       <p:sp>
         <p:nvSpPr>
-          <p:cNvPr id="37" name="Shape 35"/>
-          <p:cNvSpPr/>
-          <p:nvPr/>
-        </p:nvSpPr>
-        <p:spPr>
-          <a:xfrm>
-            <a:off x="3942207" y="4169664"/>
-            <a:ext cx="685800" cy="475488"/>
+          <p:cNvPr id="40" name="Shape 38"/>
+          <p:cNvSpPr/>
+          <p:nvPr/>
+        </p:nvSpPr>
+        <p:spPr>
+          <a:xfrm>
+            <a:off x="3403397" y="4169664"/>
+            <a:ext cx="676656" cy="475488"/>
           </a:xfrm>
           <a:prstGeom prst="rect">
             <a:avLst>
@@ -10598,14 +10808,14 @@
       </p:sp>
       <p:sp>
         <p:nvSpPr>
-          <p:cNvPr id="38" name="Text 36"/>
-          <p:cNvSpPr/>
-          <p:nvPr/>
-        </p:nvSpPr>
-        <p:spPr>
-          <a:xfrm>
-            <a:off x="3942207" y="4169664"/>
-            <a:ext cx="685800" cy="475488"/>
+          <p:cNvPr id="41" name="Text 39"/>
+          <p:cNvSpPr/>
+          <p:nvPr/>
+        </p:nvSpPr>
+        <p:spPr>
+          <a:xfrm>
+            <a:off x="3403397" y="4169664"/>
+            <a:ext cx="676656" cy="475488"/>
           </a:xfrm>
           <a:prstGeom prst="rect">
             <a:avLst/>
@@ -10637,14 +10847,14 @@
       </p:sp>
       <p:sp>
         <p:nvSpPr>
-          <p:cNvPr id="39" name="Shape 37"/>
-          <p:cNvSpPr/>
-          <p:nvPr/>
-        </p:nvSpPr>
-        <p:spPr>
-          <a:xfrm>
-            <a:off x="4850892" y="4169664"/>
-            <a:ext cx="685800" cy="475488"/>
+          <p:cNvPr id="42" name="Shape 40"/>
+          <p:cNvSpPr/>
+          <p:nvPr/>
+        </p:nvSpPr>
+        <p:spPr>
+          <a:xfrm>
+            <a:off x="4129430" y="4169664"/>
+            <a:ext cx="676656" cy="475488"/>
           </a:xfrm>
           <a:prstGeom prst="rect">
             <a:avLst>
@@ -10664,14 +10874,14 @@
       </p:sp>
       <p:sp>
         <p:nvSpPr>
-          <p:cNvPr id="40" name="Text 38"/>
-          <p:cNvSpPr/>
-          <p:nvPr/>
-        </p:nvSpPr>
-        <p:spPr>
-          <a:xfrm>
-            <a:off x="4850892" y="4169664"/>
-            <a:ext cx="685800" cy="475488"/>
+          <p:cNvPr id="43" name="Text 41"/>
+          <p:cNvSpPr/>
+          <p:nvPr/>
+        </p:nvSpPr>
+        <p:spPr>
+          <a:xfrm>
+            <a:off x="4129430" y="4169664"/>
+            <a:ext cx="676656" cy="475488"/>
           </a:xfrm>
           <a:prstGeom prst="rect">
             <a:avLst/>
@@ -10703,14 +10913,14 @@
       </p:sp>
       <p:sp>
         <p:nvSpPr>
-          <p:cNvPr id="41" name="Shape 39"/>
-          <p:cNvSpPr/>
-          <p:nvPr/>
-        </p:nvSpPr>
-        <p:spPr>
-          <a:xfrm>
-            <a:off x="5759577" y="4169664"/>
-            <a:ext cx="685800" cy="475488"/>
+          <p:cNvPr id="44" name="Shape 42"/>
+          <p:cNvSpPr/>
+          <p:nvPr/>
+        </p:nvSpPr>
+        <p:spPr>
+          <a:xfrm>
+            <a:off x="4855464" y="4169664"/>
+            <a:ext cx="676656" cy="475488"/>
           </a:xfrm>
           <a:prstGeom prst="rect">
             <a:avLst>
@@ -10730,14 +10940,14 @@
       </p:sp>
       <p:sp>
         <p:nvSpPr>
-          <p:cNvPr id="42" name="Text 40"/>
-          <p:cNvSpPr/>
-          <p:nvPr/>
-        </p:nvSpPr>
-        <p:spPr>
-          <a:xfrm>
-            <a:off x="5759577" y="4169664"/>
-            <a:ext cx="685800" cy="475488"/>
+          <p:cNvPr id="45" name="Text 43"/>
+          <p:cNvSpPr/>
+          <p:nvPr/>
+        </p:nvSpPr>
+        <p:spPr>
+          <a:xfrm>
+            <a:off x="4855464" y="4169664"/>
+            <a:ext cx="676656" cy="475488"/>
           </a:xfrm>
           <a:prstGeom prst="rect">
             <a:avLst/>
@@ -10769,14 +10979,14 @@
       </p:sp>
       <p:sp>
         <p:nvSpPr>
-          <p:cNvPr id="43" name="Shape 41"/>
-          <p:cNvSpPr/>
-          <p:nvPr/>
-        </p:nvSpPr>
-        <p:spPr>
-          <a:xfrm>
-            <a:off x="6668262" y="4169664"/>
-            <a:ext cx="685800" cy="475488"/>
+          <p:cNvPr id="46" name="Shape 44"/>
+          <p:cNvSpPr/>
+          <p:nvPr/>
+        </p:nvSpPr>
+        <p:spPr>
+          <a:xfrm>
+            <a:off x="5581498" y="4169664"/>
+            <a:ext cx="676656" cy="475488"/>
           </a:xfrm>
           <a:prstGeom prst="rect">
             <a:avLst>
@@ -10796,14 +11006,14 @@
       </p:sp>
       <p:sp>
         <p:nvSpPr>
-          <p:cNvPr id="44" name="Text 42"/>
-          <p:cNvSpPr/>
-          <p:nvPr/>
-        </p:nvSpPr>
-        <p:spPr>
-          <a:xfrm>
-            <a:off x="6668262" y="4169664"/>
-            <a:ext cx="685800" cy="475488"/>
+          <p:cNvPr id="47" name="Text 45"/>
+          <p:cNvSpPr/>
+          <p:nvPr/>
+        </p:nvSpPr>
+        <p:spPr>
+          <a:xfrm>
+            <a:off x="5581498" y="4169664"/>
+            <a:ext cx="676656" cy="475488"/>
           </a:xfrm>
           <a:prstGeom prst="rect">
             <a:avLst/>
@@ -10827,7 +11037,7 @@
                 <a:ea typeface="Trebuchet MS" pitchFamily="34" charset="-122"/>
                 <a:cs typeface="Trebuchet MS" pitchFamily="34" charset="-120"/>
               </a:rPr>
-              <a:t>e</a:t>
+              <a:t>w</a:t>
             </a:r>
             <a:endParaRPr lang="en-US" sz="900" dirty="0"/>
           </a:p>
@@ -10835,14 +11045,14 @@
       </p:sp>
       <p:sp>
         <p:nvSpPr>
-          <p:cNvPr id="45" name="Shape 43"/>
-          <p:cNvSpPr/>
-          <p:nvPr/>
-        </p:nvSpPr>
-        <p:spPr>
-          <a:xfrm>
-            <a:off x="7576947" y="4169664"/>
-            <a:ext cx="685800" cy="475488"/>
+          <p:cNvPr id="48" name="Shape 46"/>
+          <p:cNvSpPr/>
+          <p:nvPr/>
+        </p:nvSpPr>
+        <p:spPr>
+          <a:xfrm>
+            <a:off x="6307531" y="4169664"/>
+            <a:ext cx="676656" cy="475488"/>
           </a:xfrm>
           <a:prstGeom prst="rect">
             <a:avLst>
@@ -10862,14 +11072,14 @@
       </p:sp>
       <p:sp>
         <p:nvSpPr>
-          <p:cNvPr id="46" name="Text 44"/>
-          <p:cNvSpPr/>
-          <p:nvPr/>
-        </p:nvSpPr>
-        <p:spPr>
-          <a:xfrm>
-            <a:off x="7576947" y="4169664"/>
-            <a:ext cx="685800" cy="475488"/>
+          <p:cNvPr id="49" name="Text 47"/>
+          <p:cNvSpPr/>
+          <p:nvPr/>
+        </p:nvSpPr>
+        <p:spPr>
+          <a:xfrm>
+            <a:off x="6307531" y="4169664"/>
+            <a:ext cx="676656" cy="475488"/>
           </a:xfrm>
           <a:prstGeom prst="rect">
             <a:avLst/>
@@ -10893,7 +11103,139 @@
                 <a:ea typeface="Trebuchet MS" pitchFamily="34" charset="-122"/>
                 <a:cs typeface="Trebuchet MS" pitchFamily="34" charset="-120"/>
               </a:rPr>
-              <a:t>d</a:t>
+              <a:t>or</a:t>
+            </a:r>
+            <a:endParaRPr lang="en-US" sz="900" dirty="0"/>
+          </a:p>
+        </p:txBody>
+      </p:sp>
+      <p:sp>
+        <p:nvSpPr>
+          <p:cNvPr id="50" name="Shape 48"/>
+          <p:cNvSpPr/>
+          <p:nvPr/>
+        </p:nvSpPr>
+        <p:spPr>
+          <a:xfrm>
+            <a:off x="7033565" y="4169664"/>
+            <a:ext cx="676656" cy="475488"/>
+          </a:xfrm>
+          <a:prstGeom prst="rect">
+            <a:avLst>
+              <a:gd name="adj" fmla="val 7692"/>
+            </a:avLst>
+          </a:prstGeom>
+          <a:solidFill>
+            <a:srgbClr val="FFFFFF"/>
+          </a:solidFill>
+          <a:ln w="12700">
+            <a:solidFill>
+              <a:srgbClr val="DB2777"/>
+            </a:solidFill>
+            <a:prstDash val="solid"/>
+          </a:ln>
+        </p:spPr>
+      </p:sp>
+      <p:sp>
+        <p:nvSpPr>
+          <p:cNvPr id="51" name="Text 49"/>
+          <p:cNvSpPr/>
+          <p:nvPr/>
+        </p:nvSpPr>
+        <p:spPr>
+          <a:xfrm>
+            <a:off x="7033565" y="4169664"/>
+            <a:ext cx="676656" cy="475488"/>
+          </a:xfrm>
+          <a:prstGeom prst="rect">
+            <a:avLst/>
+          </a:prstGeom>
+          <a:noFill/>
+          <a:ln/>
+        </p:spPr>
+        <p:txBody>
+          <a:bodyPr wrap="square" lIns="0" tIns="0" rIns="0" bIns="0" rtlCol="0" anchor="ctr"/>
+          <a:lstStyle/>
+          <a:p>
+            <a:pPr algn="ctr" indent="0" marL="0">
+              <a:buNone/>
+            </a:pPr>
+            <a:r>
+              <a:rPr lang="en-US" sz="900" b="1" dirty="0">
+                <a:solidFill>
+                  <a:srgbClr val="9D174D"/>
+                </a:solidFill>
+                <a:latin typeface="Trebuchet MS" pitchFamily="34" charset="0"/>
+                <a:ea typeface="Trebuchet MS" pitchFamily="34" charset="-122"/>
+                <a:cs typeface="Trebuchet MS" pitchFamily="34" charset="-120"/>
+              </a:rPr>
+              <a:t>th</a:t>
+            </a:r>
+            <a:endParaRPr lang="en-US" sz="900" dirty="0"/>
+          </a:p>
+        </p:txBody>
+      </p:sp>
+      <p:sp>
+        <p:nvSpPr>
+          <p:cNvPr id="52" name="Shape 50"/>
+          <p:cNvSpPr/>
+          <p:nvPr/>
+        </p:nvSpPr>
+        <p:spPr>
+          <a:xfrm>
+            <a:off x="7759598" y="4169664"/>
+            <a:ext cx="676656" cy="475488"/>
+          </a:xfrm>
+          <a:prstGeom prst="rect">
+            <a:avLst>
+              <a:gd name="adj" fmla="val 7692"/>
+            </a:avLst>
+          </a:prstGeom>
+          <a:solidFill>
+            <a:srgbClr val="FFFFFF"/>
+          </a:solidFill>
+          <a:ln w="12700">
+            <a:solidFill>
+              <a:srgbClr val="DB2777"/>
+            </a:solidFill>
+            <a:prstDash val="solid"/>
+          </a:ln>
+        </p:spPr>
+      </p:sp>
+      <p:sp>
+        <p:nvSpPr>
+          <p:cNvPr id="53" name="Text 51"/>
+          <p:cNvSpPr/>
+          <p:nvPr/>
+        </p:nvSpPr>
+        <p:spPr>
+          <a:xfrm>
+            <a:off x="7759598" y="4169664"/>
+            <a:ext cx="676656" cy="475488"/>
+          </a:xfrm>
+          <a:prstGeom prst="rect">
+            <a:avLst/>
+          </a:prstGeom>
+          <a:noFill/>
+          <a:ln/>
+        </p:spPr>
+        <p:txBody>
+          <a:bodyPr wrap="square" lIns="0" tIns="0" rIns="0" bIns="0" rtlCol="0" anchor="ctr"/>
+          <a:lstStyle/>
+          <a:p>
+            <a:pPr algn="ctr" indent="0" marL="0">
+              <a:buNone/>
+            </a:pPr>
+            <a:r>
+              <a:rPr lang="en-US" sz="900" b="1" dirty="0">
+                <a:solidFill>
+                  <a:srgbClr val="9D174D"/>
+                </a:solidFill>
+                <a:latin typeface="Trebuchet MS" pitchFamily="34" charset="0"/>
+                <a:ea typeface="Trebuchet MS" pitchFamily="34" charset="-122"/>
+                <a:cs typeface="Trebuchet MS" pitchFamily="34" charset="-120"/>
+              </a:rPr>
+              <a:t>y</a:t>
             </a:r>
             <a:endParaRPr lang="en-US" sz="900" dirty="0"/>
           </a:p>
@@ -11324,7 +11666,7 @@
                 <a:ea typeface="Trebuchet MS" pitchFamily="34" charset="-122"/>
                 <a:cs typeface="Trebuchet MS" pitchFamily="34" charset="-120"/>
               </a:rPr>
-              <a:t>trustworthy</a:t>
+              <a:t>trusted</a:t>
             </a:r>
             <a:endParaRPr lang="en-US" sz="2800" dirty="0"/>
           </a:p>
@@ -12151,7 +12493,7 @@
                 <a:ea typeface="Trebuchet MS" pitchFamily="34" charset="-122"/>
                 <a:cs typeface="Trebuchet MS" pitchFamily="34" charset="-120"/>
               </a:rPr>
-              <a:t>trustworthy</a:t>
+              <a:t>trusted</a:t>
             </a:r>
             <a:endParaRPr lang="en-US" sz="2800" dirty="0"/>
           </a:p>
@@ -12402,7 +12744,7 @@
                 <a:ea typeface="Trebuchet MS" pitchFamily="34" charset="-122"/>
                 <a:cs typeface="Trebuchet MS" pitchFamily="34" charset="-120"/>
               </a:rPr>
-              <a:t>worthy</a:t>
+              <a:t>ed</a:t>
             </a:r>
             <a:endParaRPr lang="en-US" sz="1300" dirty="0"/>
           </a:p>
@@ -12441,7 +12783,7 @@
                 <a:ea typeface="Calibri" pitchFamily="34" charset="-122"/>
                 <a:cs typeface="Calibri" pitchFamily="34" charset="-120"/>
               </a:rPr>
-              <a:t>deserving of</a:t>
+              <a:t>past tense</a:t>
             </a:r>
             <a:endParaRPr lang="en-US" sz="850" dirty="0"/>
           </a:p>
@@ -13136,7 +13478,7 @@
                 <a:ea typeface="Trebuchet MS" pitchFamily="34" charset="-122"/>
                 <a:cs typeface="Trebuchet MS" pitchFamily="34" charset="-120"/>
               </a:rPr>
-              <a:t>trustworthy</a:t>
+              <a:t>trusted</a:t>
             </a:r>
             <a:endParaRPr lang="en-US" sz="2800" dirty="0"/>
           </a:p>
@@ -13387,7 +13729,7 @@
                 <a:ea typeface="Trebuchet MS" pitchFamily="34" charset="-122"/>
                 <a:cs typeface="Trebuchet MS" pitchFamily="34" charset="-120"/>
               </a:rPr>
-              <a:t>worthy</a:t>
+              <a:t>ed</a:t>
             </a:r>
             <a:endParaRPr lang="en-US" sz="1300" dirty="0"/>
           </a:p>
@@ -13426,7 +13768,7 @@
                 <a:ea typeface="Calibri" pitchFamily="34" charset="-122"/>
                 <a:cs typeface="Calibri" pitchFamily="34" charset="-120"/>
               </a:rPr>
-              <a:t>deserving of</a:t>
+              <a:t>past tense</a:t>
             </a:r>
             <a:endParaRPr lang="en-US" sz="850" dirty="0"/>
           </a:p>
@@ -13533,7 +13875,7 @@
         </p:nvSpPr>
         <p:spPr>
           <a:xfrm>
-            <a:off x="2313432" y="3364992"/>
+            <a:off x="2999232" y="3364992"/>
             <a:ext cx="1645920" cy="475488"/>
           </a:xfrm>
           <a:prstGeom prst="rect">
@@ -13560,7 +13902,7 @@
         </p:nvSpPr>
         <p:spPr>
           <a:xfrm>
-            <a:off x="2313432" y="3364992"/>
+            <a:off x="2999232" y="3364992"/>
             <a:ext cx="1645920" cy="475488"/>
           </a:xfrm>
           <a:prstGeom prst="rect">
@@ -13599,8 +13941,8 @@
         </p:nvSpPr>
         <p:spPr>
           <a:xfrm>
-            <a:off x="3959352" y="3364992"/>
-            <a:ext cx="411480" cy="475488"/>
+            <a:off x="4645152" y="3364992"/>
+            <a:ext cx="1097280" cy="475488"/>
           </a:xfrm>
           <a:prstGeom prst="rect">
             <a:avLst/>
@@ -13638,7 +13980,7 @@
         </p:nvSpPr>
         <p:spPr>
           <a:xfrm>
-            <a:off x="4370832" y="3364992"/>
+            <a:off x="5742432" y="3364992"/>
             <a:ext cx="1645920" cy="475488"/>
           </a:xfrm>
           <a:prstGeom prst="rect">
@@ -13665,7 +14007,7 @@
         </p:nvSpPr>
         <p:spPr>
           <a:xfrm>
-            <a:off x="4370832" y="3364992"/>
+            <a:off x="5742432" y="3364992"/>
             <a:ext cx="1645920" cy="475488"/>
           </a:xfrm>
           <a:prstGeom prst="rect">
@@ -13690,7 +14032,7 @@
                 <a:ea typeface="Trebuchet MS" pitchFamily="34" charset="-122"/>
                 <a:cs typeface="Trebuchet MS" pitchFamily="34" charset="-120"/>
               </a:rPr>
-              <a:t>wor</a:t>
+              <a:t>ed</a:t>
             </a:r>
             <a:endParaRPr lang="en-US" sz="1400" dirty="0"/>
           </a:p>
@@ -13698,119 +14040,80 @@
       </p:sp>
       <p:sp>
         <p:nvSpPr>
-          <p:cNvPr id="30" name="Text 28"/>
-          <p:cNvSpPr/>
-          <p:nvPr/>
-        </p:nvSpPr>
-        <p:spPr>
-          <a:xfrm>
-            <a:off x="6016752" y="3364992"/>
-            <a:ext cx="411480" cy="475488"/>
-          </a:xfrm>
-          <a:prstGeom prst="rect">
-            <a:avLst/>
-          </a:prstGeom>
-          <a:noFill/>
-          <a:ln/>
-        </p:spPr>
-        <p:txBody>
-          <a:bodyPr wrap="square" lIns="0" tIns="0" rIns="0" bIns="0" rtlCol="0" anchor="ctr"/>
-          <a:lstStyle/>
-          <a:p>
-            <a:pPr algn="ctr" indent="0" marL="0">
-              <a:buNone/>
-            </a:pPr>
-            <a:r>
-              <a:rPr lang="en-US" sz="1600" b="1" dirty="0">
-                <a:solidFill>
-                  <a:srgbClr val="0D9488"/>
+          <p:cNvPr id="30" name="Shape 28"/>
+          <p:cNvSpPr/>
+          <p:nvPr/>
+        </p:nvSpPr>
+        <p:spPr>
+          <a:xfrm>
+            <a:off x="365760" y="4096512"/>
+            <a:ext cx="1371600" cy="804672"/>
+          </a:xfrm>
+          <a:prstGeom prst="rect">
+            <a:avLst>
+              <a:gd name="adj" fmla="val 6818"/>
+            </a:avLst>
+          </a:prstGeom>
+          <a:solidFill>
+            <a:srgbClr val="E2E8F0"/>
+          </a:solidFill>
+          <a:ln w="12700">
+            <a:solidFill>
+              <a:srgbClr val="E2E8F0"/>
+            </a:solidFill>
+            <a:prstDash val="solid"/>
+          </a:ln>
+        </p:spPr>
+      </p:sp>
+      <p:sp>
+        <p:nvSpPr>
+          <p:cNvPr id="31" name="Text 29"/>
+          <p:cNvSpPr/>
+          <p:nvPr/>
+        </p:nvSpPr>
+        <p:spPr>
+          <a:xfrm>
+            <a:off x="365760" y="4096512"/>
+            <a:ext cx="1371600" cy="804672"/>
+          </a:xfrm>
+          <a:prstGeom prst="rect">
+            <a:avLst/>
+          </a:prstGeom>
+          <a:noFill/>
+          <a:ln/>
+        </p:spPr>
+        <p:txBody>
+          <a:bodyPr wrap="square" lIns="0" tIns="0" rIns="0" bIns="0" rtlCol="0" anchor="ctr"/>
+          <a:lstStyle/>
+          <a:p>
+            <a:pPr algn="ctr" indent="0" marL="0">
+              <a:buNone/>
+            </a:pPr>
+            <a:r>
+              <a:rPr lang="en-US" sz="1100" b="1" dirty="0">
+                <a:solidFill>
+                  <a:srgbClr val="475569"/>
                 </a:solidFill>
                 <a:latin typeface="Trebuchet MS" pitchFamily="34" charset="0"/>
                 <a:ea typeface="Trebuchet MS" pitchFamily="34" charset="-122"/>
                 <a:cs typeface="Trebuchet MS" pitchFamily="34" charset="-120"/>
               </a:rPr>
-              <a:t>·</a:t>
-            </a:r>
-            <a:endParaRPr lang="en-US" sz="1600" dirty="0"/>
-          </a:p>
-        </p:txBody>
-      </p:sp>
-      <p:sp>
-        <p:nvSpPr>
-          <p:cNvPr id="31" name="Shape 29"/>
-          <p:cNvSpPr/>
-          <p:nvPr/>
-        </p:nvSpPr>
-        <p:spPr>
-          <a:xfrm>
-            <a:off x="6428232" y="3364992"/>
-            <a:ext cx="1645920" cy="475488"/>
-          </a:xfrm>
-          <a:prstGeom prst="rect">
-            <a:avLst>
-              <a:gd name="adj" fmla="val 9615"/>
-            </a:avLst>
-          </a:prstGeom>
-          <a:solidFill>
-            <a:srgbClr val="FFFFFF"/>
-          </a:solidFill>
-          <a:ln w="12700">
-            <a:solidFill>
-              <a:srgbClr val="0D9488"/>
-            </a:solidFill>
-            <a:prstDash val="solid"/>
-          </a:ln>
-        </p:spPr>
-      </p:sp>
-      <p:sp>
-        <p:nvSpPr>
-          <p:cNvPr id="32" name="Text 30"/>
-          <p:cNvSpPr/>
-          <p:nvPr/>
-        </p:nvSpPr>
-        <p:spPr>
-          <a:xfrm>
-            <a:off x="6428232" y="3364992"/>
-            <a:ext cx="1645920" cy="475488"/>
-          </a:xfrm>
-          <a:prstGeom prst="rect">
-            <a:avLst/>
-          </a:prstGeom>
-          <a:noFill/>
-          <a:ln/>
-        </p:spPr>
-        <p:txBody>
-          <a:bodyPr wrap="square" lIns="0" tIns="0" rIns="0" bIns="0" rtlCol="0" anchor="ctr"/>
-          <a:lstStyle/>
-          <a:p>
-            <a:pPr algn="ctr" indent="0" marL="0">
-              <a:buNone/>
-            </a:pPr>
-            <a:r>
-              <a:rPr lang="en-US" sz="1400" b="1" dirty="0">
-                <a:solidFill>
-                  <a:srgbClr val="0D9488"/>
-                </a:solidFill>
-                <a:latin typeface="Trebuchet MS" pitchFamily="34" charset="0"/>
-                <a:ea typeface="Trebuchet MS" pitchFamily="34" charset="-122"/>
-                <a:cs typeface="Trebuchet MS" pitchFamily="34" charset="-120"/>
-              </a:rPr>
-              <a:t>thy</a:t>
-            </a:r>
-            <a:endParaRPr lang="en-US" sz="1400" dirty="0"/>
-          </a:p>
-        </p:txBody>
-      </p:sp>
-      <p:sp>
-        <p:nvSpPr>
-          <p:cNvPr id="33" name="Shape 31"/>
-          <p:cNvSpPr/>
-          <p:nvPr/>
-        </p:nvSpPr>
-        <p:spPr>
-          <a:xfrm>
-            <a:off x="365760" y="4096512"/>
-            <a:ext cx="1371600" cy="804672"/>
+              <a:t>Phonemes</a:t>
+            </a:r>
+            <a:endParaRPr lang="en-US" sz="1100" dirty="0"/>
+          </a:p>
+        </p:txBody>
+      </p:sp>
+      <p:sp>
+        <p:nvSpPr>
+          <p:cNvPr id="32" name="Shape 30"/>
+          <p:cNvSpPr/>
+          <p:nvPr/>
+        </p:nvSpPr>
+        <p:spPr>
+          <a:xfrm>
+            <a:off x="1874520" y="4096512"/>
+            <a:ext cx="6903720" cy="804672"/>
           </a:xfrm>
           <a:prstGeom prst="rect">
             <a:avLst>
@@ -13818,85 +14121,19 @@
             </a:avLst>
           </a:prstGeom>
           <a:solidFill>
-            <a:srgbClr val="E2E8F0"/>
+            <a:srgbClr val="F8FAFC"/>
           </a:solidFill>
           <a:ln w="12700">
             <a:solidFill>
               <a:srgbClr val="E2E8F0"/>
             </a:solidFill>
-            <a:prstDash val="solid"/>
-          </a:ln>
-        </p:spPr>
-      </p:sp>
-      <p:sp>
-        <p:nvSpPr>
-          <p:cNvPr id="34" name="Text 32"/>
-          <p:cNvSpPr/>
-          <p:nvPr/>
-        </p:nvSpPr>
-        <p:spPr>
-          <a:xfrm>
-            <a:off x="365760" y="4096512"/>
-            <a:ext cx="1371600" cy="804672"/>
-          </a:xfrm>
-          <a:prstGeom prst="rect">
-            <a:avLst/>
-          </a:prstGeom>
-          <a:noFill/>
-          <a:ln/>
-        </p:spPr>
-        <p:txBody>
-          <a:bodyPr wrap="square" lIns="0" tIns="0" rIns="0" bIns="0" rtlCol="0" anchor="ctr"/>
-          <a:lstStyle/>
-          <a:p>
-            <a:pPr algn="ctr" indent="0" marL="0">
-              <a:buNone/>
-            </a:pPr>
-            <a:r>
-              <a:rPr lang="en-US" sz="1100" b="1" dirty="0">
-                <a:solidFill>
-                  <a:srgbClr val="475569"/>
-                </a:solidFill>
-                <a:latin typeface="Trebuchet MS" pitchFamily="34" charset="0"/>
-                <a:ea typeface="Trebuchet MS" pitchFamily="34" charset="-122"/>
-                <a:cs typeface="Trebuchet MS" pitchFamily="34" charset="-120"/>
-              </a:rPr>
-              <a:t>Phonemes</a:t>
-            </a:r>
-            <a:endParaRPr lang="en-US" sz="1100" dirty="0"/>
-          </a:p>
-        </p:txBody>
-      </p:sp>
-      <p:sp>
-        <p:nvSpPr>
-          <p:cNvPr id="35" name="Shape 33"/>
-          <p:cNvSpPr/>
-          <p:nvPr/>
-        </p:nvSpPr>
-        <p:spPr>
-          <a:xfrm>
-            <a:off x="1874520" y="4096512"/>
-            <a:ext cx="6903720" cy="804672"/>
-          </a:xfrm>
-          <a:prstGeom prst="rect">
-            <a:avLst>
-              <a:gd name="adj" fmla="val 6818"/>
-            </a:avLst>
-          </a:prstGeom>
-          <a:solidFill>
-            <a:srgbClr val="F8FAFC"/>
-          </a:solidFill>
-          <a:ln w="12700">
-            <a:solidFill>
-              <a:srgbClr val="E2E8F0"/>
-            </a:solidFill>
             <a:prstDash val="dash"/>
           </a:ln>
         </p:spPr>
       </p:sp>
       <p:sp>
         <p:nvSpPr>
-          <p:cNvPr id="36" name="Text 34"/>
+          <p:cNvPr id="33" name="Text 31"/>
           <p:cNvSpPr/>
           <p:nvPr/>
         </p:nvSpPr>
@@ -14623,7 +14860,7 @@
                 <a:ea typeface="Trebuchet MS" pitchFamily="34" charset="-122"/>
                 <a:cs typeface="Trebuchet MS" pitchFamily="34" charset="-120"/>
               </a:rPr>
-              <a:t>trustworthy</a:t>
+              <a:t>trusted</a:t>
             </a:r>
             <a:endParaRPr lang="en-US" sz="2800" dirty="0"/>
           </a:p>
@@ -14874,7 +15111,7 @@
                 <a:ea typeface="Trebuchet MS" pitchFamily="34" charset="-122"/>
                 <a:cs typeface="Trebuchet MS" pitchFamily="34" charset="-120"/>
               </a:rPr>
-              <a:t>worthy</a:t>
+              <a:t>ed</a:t>
             </a:r>
             <a:endParaRPr lang="en-US" sz="1300" dirty="0"/>
           </a:p>
@@ -14913,7 +15150,7 @@
                 <a:ea typeface="Calibri" pitchFamily="34" charset="-122"/>
                 <a:cs typeface="Calibri" pitchFamily="34" charset="-120"/>
               </a:rPr>
-              <a:t>deserving of</a:t>
+              <a:t>past tense</a:t>
             </a:r>
             <a:endParaRPr lang="en-US" sz="850" dirty="0"/>
           </a:p>
@@ -15020,7 +15257,7 @@
         </p:nvSpPr>
         <p:spPr>
           <a:xfrm>
-            <a:off x="2313432" y="3364992"/>
+            <a:off x="2999232" y="3364992"/>
             <a:ext cx="1645920" cy="475488"/>
           </a:xfrm>
           <a:prstGeom prst="rect">
@@ -15047,7 +15284,7 @@
         </p:nvSpPr>
         <p:spPr>
           <a:xfrm>
-            <a:off x="2313432" y="3364992"/>
+            <a:off x="2999232" y="3364992"/>
             <a:ext cx="1645920" cy="475488"/>
           </a:xfrm>
           <a:prstGeom prst="rect">
@@ -15086,8 +15323,8 @@
         </p:nvSpPr>
         <p:spPr>
           <a:xfrm>
-            <a:off x="3959352" y="3364992"/>
-            <a:ext cx="411480" cy="475488"/>
+            <a:off x="4645152" y="3364992"/>
+            <a:ext cx="1097280" cy="475488"/>
           </a:xfrm>
           <a:prstGeom prst="rect">
             <a:avLst/>
@@ -15125,7 +15362,7 @@
         </p:nvSpPr>
         <p:spPr>
           <a:xfrm>
-            <a:off x="4370832" y="3364992"/>
+            <a:off x="5742432" y="3364992"/>
             <a:ext cx="1645920" cy="475488"/>
           </a:xfrm>
           <a:prstGeom prst="rect">
@@ -15152,7 +15389,7 @@
         </p:nvSpPr>
         <p:spPr>
           <a:xfrm>
-            <a:off x="4370832" y="3364992"/>
+            <a:off x="5742432" y="3364992"/>
             <a:ext cx="1645920" cy="475488"/>
           </a:xfrm>
           <a:prstGeom prst="rect">
@@ -15177,7 +15414,7 @@
                 <a:ea typeface="Trebuchet MS" pitchFamily="34" charset="-122"/>
                 <a:cs typeface="Trebuchet MS" pitchFamily="34" charset="-120"/>
               </a:rPr>
-              <a:t>wor</a:t>
+              <a:t>ed</a:t>
             </a:r>
             <a:endParaRPr lang="en-US" sz="1400" dirty="0"/>
           </a:p>
@@ -15185,212 +15422,239 @@
       </p:sp>
       <p:sp>
         <p:nvSpPr>
-          <p:cNvPr id="30" name="Text 28"/>
-          <p:cNvSpPr/>
-          <p:nvPr/>
-        </p:nvSpPr>
-        <p:spPr>
-          <a:xfrm>
-            <a:off x="6016752" y="3364992"/>
-            <a:ext cx="411480" cy="475488"/>
-          </a:xfrm>
-          <a:prstGeom prst="rect">
-            <a:avLst/>
-          </a:prstGeom>
-          <a:noFill/>
-          <a:ln/>
-        </p:spPr>
-        <p:txBody>
-          <a:bodyPr wrap="square" lIns="0" tIns="0" rIns="0" bIns="0" rtlCol="0" anchor="ctr"/>
-          <a:lstStyle/>
-          <a:p>
-            <a:pPr algn="ctr" indent="0" marL="0">
-              <a:buNone/>
-            </a:pPr>
-            <a:r>
-              <a:rPr lang="en-US" sz="1600" b="1" dirty="0">
-                <a:solidFill>
-                  <a:srgbClr val="0D9488"/>
+          <p:cNvPr id="30" name="Shape 28"/>
+          <p:cNvSpPr/>
+          <p:nvPr/>
+        </p:nvSpPr>
+        <p:spPr>
+          <a:xfrm>
+            <a:off x="365760" y="4096512"/>
+            <a:ext cx="1371600" cy="804672"/>
+          </a:xfrm>
+          <a:prstGeom prst="rect">
+            <a:avLst>
+              <a:gd name="adj" fmla="val 6818"/>
+            </a:avLst>
+          </a:prstGeom>
+          <a:solidFill>
+            <a:srgbClr val="E2E8F0"/>
+          </a:solidFill>
+          <a:ln w="12700">
+            <a:solidFill>
+              <a:srgbClr val="E2E8F0"/>
+            </a:solidFill>
+            <a:prstDash val="solid"/>
+          </a:ln>
+        </p:spPr>
+      </p:sp>
+      <p:sp>
+        <p:nvSpPr>
+          <p:cNvPr id="31" name="Text 29"/>
+          <p:cNvSpPr/>
+          <p:nvPr/>
+        </p:nvSpPr>
+        <p:spPr>
+          <a:xfrm>
+            <a:off x="365760" y="4096512"/>
+            <a:ext cx="1371600" cy="804672"/>
+          </a:xfrm>
+          <a:prstGeom prst="rect">
+            <a:avLst/>
+          </a:prstGeom>
+          <a:noFill/>
+          <a:ln/>
+        </p:spPr>
+        <p:txBody>
+          <a:bodyPr wrap="square" lIns="0" tIns="0" rIns="0" bIns="0" rtlCol="0" anchor="ctr"/>
+          <a:lstStyle/>
+          <a:p>
+            <a:pPr algn="ctr" indent="0" marL="0">
+              <a:buNone/>
+            </a:pPr>
+            <a:r>
+              <a:rPr lang="en-US" sz="1100" b="1" dirty="0">
+                <a:solidFill>
+                  <a:srgbClr val="475569"/>
                 </a:solidFill>
                 <a:latin typeface="Trebuchet MS" pitchFamily="34" charset="0"/>
                 <a:ea typeface="Trebuchet MS" pitchFamily="34" charset="-122"/>
                 <a:cs typeface="Trebuchet MS" pitchFamily="34" charset="-120"/>
               </a:rPr>
-              <a:t>·</a:t>
-            </a:r>
-            <a:endParaRPr lang="en-US" sz="1600" dirty="0"/>
-          </a:p>
-        </p:txBody>
-      </p:sp>
-      <p:sp>
-        <p:nvSpPr>
-          <p:cNvPr id="31" name="Shape 29"/>
-          <p:cNvSpPr/>
-          <p:nvPr/>
-        </p:nvSpPr>
-        <p:spPr>
-          <a:xfrm>
-            <a:off x="6428232" y="3364992"/>
-            <a:ext cx="1645920" cy="475488"/>
+              <a:t>Phonemes</a:t>
+            </a:r>
+            <a:endParaRPr lang="en-US" sz="1100" dirty="0"/>
+          </a:p>
+        </p:txBody>
+      </p:sp>
+      <p:sp>
+        <p:nvSpPr>
+          <p:cNvPr id="32" name="Shape 30"/>
+          <p:cNvSpPr/>
+          <p:nvPr/>
+        </p:nvSpPr>
+        <p:spPr>
+          <a:xfrm>
+            <a:off x="1874520" y="4096512"/>
+            <a:ext cx="6903720" cy="658368"/>
           </a:xfrm>
           <a:prstGeom prst="rect">
             <a:avLst>
-              <a:gd name="adj" fmla="val 9615"/>
+              <a:gd name="adj" fmla="val 8333"/>
             </a:avLst>
           </a:prstGeom>
           <a:solidFill>
+            <a:srgbClr val="FCE7F3"/>
+          </a:solidFill>
+          <a:ln w="12700">
+            <a:solidFill>
+              <a:srgbClr val="DB2777"/>
+            </a:solidFill>
+            <a:prstDash val="solid"/>
+          </a:ln>
+        </p:spPr>
+      </p:sp>
+      <p:sp>
+        <p:nvSpPr>
+          <p:cNvPr id="33" name="Shape 31"/>
+          <p:cNvSpPr/>
+          <p:nvPr/>
+        </p:nvSpPr>
+        <p:spPr>
+          <a:xfrm>
+            <a:off x="2124837" y="4169664"/>
+            <a:ext cx="685800" cy="475488"/>
+          </a:xfrm>
+          <a:prstGeom prst="rect">
+            <a:avLst>
+              <a:gd name="adj" fmla="val 7692"/>
+            </a:avLst>
+          </a:prstGeom>
+          <a:solidFill>
             <a:srgbClr val="FFFFFF"/>
           </a:solidFill>
           <a:ln w="12700">
             <a:solidFill>
-              <a:srgbClr val="0D9488"/>
-            </a:solidFill>
-            <a:prstDash val="solid"/>
-          </a:ln>
-        </p:spPr>
-      </p:sp>
-      <p:sp>
-        <p:nvSpPr>
-          <p:cNvPr id="32" name="Text 30"/>
-          <p:cNvSpPr/>
-          <p:nvPr/>
-        </p:nvSpPr>
-        <p:spPr>
-          <a:xfrm>
-            <a:off x="6428232" y="3364992"/>
-            <a:ext cx="1645920" cy="475488"/>
-          </a:xfrm>
-          <a:prstGeom prst="rect">
-            <a:avLst/>
-          </a:prstGeom>
-          <a:noFill/>
-          <a:ln/>
-        </p:spPr>
-        <p:txBody>
-          <a:bodyPr wrap="square" lIns="0" tIns="0" rIns="0" bIns="0" rtlCol="0" anchor="ctr"/>
-          <a:lstStyle/>
-          <a:p>
-            <a:pPr algn="ctr" indent="0" marL="0">
-              <a:buNone/>
-            </a:pPr>
-            <a:r>
-              <a:rPr lang="en-US" sz="1400" b="1" dirty="0">
-                <a:solidFill>
-                  <a:srgbClr val="0D9488"/>
+              <a:srgbClr val="DB2777"/>
+            </a:solidFill>
+            <a:prstDash val="solid"/>
+          </a:ln>
+        </p:spPr>
+      </p:sp>
+      <p:sp>
+        <p:nvSpPr>
+          <p:cNvPr id="34" name="Text 32"/>
+          <p:cNvSpPr/>
+          <p:nvPr/>
+        </p:nvSpPr>
+        <p:spPr>
+          <a:xfrm>
+            <a:off x="2124837" y="4169664"/>
+            <a:ext cx="685800" cy="475488"/>
+          </a:xfrm>
+          <a:prstGeom prst="rect">
+            <a:avLst/>
+          </a:prstGeom>
+          <a:noFill/>
+          <a:ln/>
+        </p:spPr>
+        <p:txBody>
+          <a:bodyPr wrap="square" lIns="0" tIns="0" rIns="0" bIns="0" rtlCol="0" anchor="ctr"/>
+          <a:lstStyle/>
+          <a:p>
+            <a:pPr algn="ctr" indent="0" marL="0">
+              <a:buNone/>
+            </a:pPr>
+            <a:r>
+              <a:rPr lang="en-US" sz="900" b="1" dirty="0">
+                <a:solidFill>
+                  <a:srgbClr val="9D174D"/>
                 </a:solidFill>
                 <a:latin typeface="Trebuchet MS" pitchFamily="34" charset="0"/>
                 <a:ea typeface="Trebuchet MS" pitchFamily="34" charset="-122"/>
                 <a:cs typeface="Trebuchet MS" pitchFamily="34" charset="-120"/>
               </a:rPr>
-              <a:t>thy</a:t>
-            </a:r>
-            <a:endParaRPr lang="en-US" sz="1400" dirty="0"/>
-          </a:p>
-        </p:txBody>
-      </p:sp>
-      <p:sp>
-        <p:nvSpPr>
-          <p:cNvPr id="33" name="Shape 31"/>
-          <p:cNvSpPr/>
-          <p:nvPr/>
-        </p:nvSpPr>
-        <p:spPr>
-          <a:xfrm>
-            <a:off x="365760" y="4096512"/>
-            <a:ext cx="1371600" cy="804672"/>
+              <a:t>t</a:t>
+            </a:r>
+            <a:endParaRPr lang="en-US" sz="900" dirty="0"/>
+          </a:p>
+        </p:txBody>
+      </p:sp>
+      <p:sp>
+        <p:nvSpPr>
+          <p:cNvPr id="35" name="Shape 33"/>
+          <p:cNvSpPr/>
+          <p:nvPr/>
+        </p:nvSpPr>
+        <p:spPr>
+          <a:xfrm>
+            <a:off x="3033522" y="4169664"/>
+            <a:ext cx="685800" cy="475488"/>
           </a:xfrm>
           <a:prstGeom prst="rect">
             <a:avLst>
-              <a:gd name="adj" fmla="val 6818"/>
+              <a:gd name="adj" fmla="val 7692"/>
             </a:avLst>
           </a:prstGeom>
           <a:solidFill>
-            <a:srgbClr val="E2E8F0"/>
-          </a:solidFill>
-          <a:ln w="12700">
-            <a:solidFill>
-              <a:srgbClr val="E2E8F0"/>
-            </a:solidFill>
-            <a:prstDash val="solid"/>
-          </a:ln>
-        </p:spPr>
-      </p:sp>
-      <p:sp>
-        <p:nvSpPr>
-          <p:cNvPr id="34" name="Text 32"/>
-          <p:cNvSpPr/>
-          <p:nvPr/>
-        </p:nvSpPr>
-        <p:spPr>
-          <a:xfrm>
-            <a:off x="365760" y="4096512"/>
-            <a:ext cx="1371600" cy="804672"/>
-          </a:xfrm>
-          <a:prstGeom prst="rect">
-            <a:avLst/>
-          </a:prstGeom>
-          <a:noFill/>
-          <a:ln/>
-        </p:spPr>
-        <p:txBody>
-          <a:bodyPr wrap="square" lIns="0" tIns="0" rIns="0" bIns="0" rtlCol="0" anchor="ctr"/>
-          <a:lstStyle/>
-          <a:p>
-            <a:pPr algn="ctr" indent="0" marL="0">
-              <a:buNone/>
-            </a:pPr>
-            <a:r>
-              <a:rPr lang="en-US" sz="1100" b="1" dirty="0">
-                <a:solidFill>
-                  <a:srgbClr val="475569"/>
+            <a:srgbClr val="FFFFFF"/>
+          </a:solidFill>
+          <a:ln w="12700">
+            <a:solidFill>
+              <a:srgbClr val="DB2777"/>
+            </a:solidFill>
+            <a:prstDash val="solid"/>
+          </a:ln>
+        </p:spPr>
+      </p:sp>
+      <p:sp>
+        <p:nvSpPr>
+          <p:cNvPr id="36" name="Text 34"/>
+          <p:cNvSpPr/>
+          <p:nvPr/>
+        </p:nvSpPr>
+        <p:spPr>
+          <a:xfrm>
+            <a:off x="3033522" y="4169664"/>
+            <a:ext cx="685800" cy="475488"/>
+          </a:xfrm>
+          <a:prstGeom prst="rect">
+            <a:avLst/>
+          </a:prstGeom>
+          <a:noFill/>
+          <a:ln/>
+        </p:spPr>
+        <p:txBody>
+          <a:bodyPr wrap="square" lIns="0" tIns="0" rIns="0" bIns="0" rtlCol="0" anchor="ctr"/>
+          <a:lstStyle/>
+          <a:p>
+            <a:pPr algn="ctr" indent="0" marL="0">
+              <a:buNone/>
+            </a:pPr>
+            <a:r>
+              <a:rPr lang="en-US" sz="900" b="1" dirty="0">
+                <a:solidFill>
+                  <a:srgbClr val="9D174D"/>
                 </a:solidFill>
                 <a:latin typeface="Trebuchet MS" pitchFamily="34" charset="0"/>
                 <a:ea typeface="Trebuchet MS" pitchFamily="34" charset="-122"/>
                 <a:cs typeface="Trebuchet MS" pitchFamily="34" charset="-120"/>
               </a:rPr>
-              <a:t>Phonemes</a:t>
-            </a:r>
-            <a:endParaRPr lang="en-US" sz="1100" dirty="0"/>
-          </a:p>
-        </p:txBody>
-      </p:sp>
-      <p:sp>
-        <p:nvSpPr>
-          <p:cNvPr id="35" name="Shape 33"/>
-          <p:cNvSpPr/>
-          <p:nvPr/>
-        </p:nvSpPr>
-        <p:spPr>
-          <a:xfrm>
-            <a:off x="1874520" y="4096512"/>
-            <a:ext cx="6903720" cy="658368"/>
-          </a:xfrm>
-          <a:prstGeom prst="rect">
-            <a:avLst>
-              <a:gd name="adj" fmla="val 8333"/>
-            </a:avLst>
-          </a:prstGeom>
-          <a:solidFill>
-            <a:srgbClr val="FCE7F3"/>
-          </a:solidFill>
-          <a:ln w="12700">
-            <a:solidFill>
-              <a:srgbClr val="DB2777"/>
-            </a:solidFill>
-            <a:prstDash val="solid"/>
-          </a:ln>
-        </p:spPr>
-      </p:sp>
-      <p:sp>
-        <p:nvSpPr>
-          <p:cNvPr id="36" name="Shape 34"/>
-          <p:cNvSpPr/>
-          <p:nvPr/>
-        </p:nvSpPr>
-        <p:spPr>
-          <a:xfrm>
-            <a:off x="1951330" y="4169664"/>
-            <a:ext cx="676656" cy="475488"/>
+              <a:t>r</a:t>
+            </a:r>
+            <a:endParaRPr lang="en-US" sz="900" dirty="0"/>
+          </a:p>
+        </p:txBody>
+      </p:sp>
+      <p:sp>
+        <p:nvSpPr>
+          <p:cNvPr id="37" name="Shape 35"/>
+          <p:cNvSpPr/>
+          <p:nvPr/>
+        </p:nvSpPr>
+        <p:spPr>
+          <a:xfrm>
+            <a:off x="3942207" y="4169664"/>
+            <a:ext cx="685800" cy="475488"/>
           </a:xfrm>
           <a:prstGeom prst="rect">
             <a:avLst>
@@ -15410,14 +15674,14 @@
       </p:sp>
       <p:sp>
         <p:nvSpPr>
-          <p:cNvPr id="37" name="Text 35"/>
-          <p:cNvSpPr/>
-          <p:nvPr/>
-        </p:nvSpPr>
-        <p:spPr>
-          <a:xfrm>
-            <a:off x="1951330" y="4169664"/>
-            <a:ext cx="676656" cy="475488"/>
+          <p:cNvPr id="38" name="Text 36"/>
+          <p:cNvSpPr/>
+          <p:nvPr/>
+        </p:nvSpPr>
+        <p:spPr>
+          <a:xfrm>
+            <a:off x="3942207" y="4169664"/>
+            <a:ext cx="685800" cy="475488"/>
           </a:xfrm>
           <a:prstGeom prst="rect">
             <a:avLst/>
@@ -15441,7 +15705,7 @@
                 <a:ea typeface="Trebuchet MS" pitchFamily="34" charset="-122"/>
                 <a:cs typeface="Trebuchet MS" pitchFamily="34" charset="-120"/>
               </a:rPr>
-              <a:t>t</a:t>
+              <a:t>u</a:t>
             </a:r>
             <a:endParaRPr lang="en-US" sz="900" dirty="0"/>
           </a:p>
@@ -15449,14 +15713,14 @@
       </p:sp>
       <p:sp>
         <p:nvSpPr>
-          <p:cNvPr id="38" name="Shape 36"/>
-          <p:cNvSpPr/>
-          <p:nvPr/>
-        </p:nvSpPr>
-        <p:spPr>
-          <a:xfrm>
-            <a:off x="2677363" y="4169664"/>
-            <a:ext cx="676656" cy="475488"/>
+          <p:cNvPr id="39" name="Shape 37"/>
+          <p:cNvSpPr/>
+          <p:nvPr/>
+        </p:nvSpPr>
+        <p:spPr>
+          <a:xfrm>
+            <a:off x="4850892" y="4169664"/>
+            <a:ext cx="685800" cy="475488"/>
           </a:xfrm>
           <a:prstGeom prst="rect">
             <a:avLst>
@@ -15476,14 +15740,14 @@
       </p:sp>
       <p:sp>
         <p:nvSpPr>
-          <p:cNvPr id="39" name="Text 37"/>
-          <p:cNvSpPr/>
-          <p:nvPr/>
-        </p:nvSpPr>
-        <p:spPr>
-          <a:xfrm>
-            <a:off x="2677363" y="4169664"/>
-            <a:ext cx="676656" cy="475488"/>
+          <p:cNvPr id="40" name="Text 38"/>
+          <p:cNvSpPr/>
+          <p:nvPr/>
+        </p:nvSpPr>
+        <p:spPr>
+          <a:xfrm>
+            <a:off x="4850892" y="4169664"/>
+            <a:ext cx="685800" cy="475488"/>
           </a:xfrm>
           <a:prstGeom prst="rect">
             <a:avLst/>
@@ -15507,7 +15771,7 @@
                 <a:ea typeface="Trebuchet MS" pitchFamily="34" charset="-122"/>
                 <a:cs typeface="Trebuchet MS" pitchFamily="34" charset="-120"/>
               </a:rPr>
-              <a:t>r</a:t>
+              <a:t>s</a:t>
             </a:r>
             <a:endParaRPr lang="en-US" sz="900" dirty="0"/>
           </a:p>
@@ -15515,14 +15779,14 @@
       </p:sp>
       <p:sp>
         <p:nvSpPr>
-          <p:cNvPr id="40" name="Shape 38"/>
-          <p:cNvSpPr/>
-          <p:nvPr/>
-        </p:nvSpPr>
-        <p:spPr>
-          <a:xfrm>
-            <a:off x="3403397" y="4169664"/>
-            <a:ext cx="676656" cy="475488"/>
+          <p:cNvPr id="41" name="Shape 39"/>
+          <p:cNvSpPr/>
+          <p:nvPr/>
+        </p:nvSpPr>
+        <p:spPr>
+          <a:xfrm>
+            <a:off x="5759577" y="4169664"/>
+            <a:ext cx="685800" cy="475488"/>
           </a:xfrm>
           <a:prstGeom prst="rect">
             <a:avLst>
@@ -15542,14 +15806,14 @@
       </p:sp>
       <p:sp>
         <p:nvSpPr>
-          <p:cNvPr id="41" name="Text 39"/>
-          <p:cNvSpPr/>
-          <p:nvPr/>
-        </p:nvSpPr>
-        <p:spPr>
-          <a:xfrm>
-            <a:off x="3403397" y="4169664"/>
-            <a:ext cx="676656" cy="475488"/>
+          <p:cNvPr id="42" name="Text 40"/>
+          <p:cNvSpPr/>
+          <p:nvPr/>
+        </p:nvSpPr>
+        <p:spPr>
+          <a:xfrm>
+            <a:off x="5759577" y="4169664"/>
+            <a:ext cx="685800" cy="475488"/>
           </a:xfrm>
           <a:prstGeom prst="rect">
             <a:avLst/>
@@ -15573,7 +15837,7 @@
                 <a:ea typeface="Trebuchet MS" pitchFamily="34" charset="-122"/>
                 <a:cs typeface="Trebuchet MS" pitchFamily="34" charset="-120"/>
               </a:rPr>
-              <a:t>u</a:t>
+              <a:t>t</a:t>
             </a:r>
             <a:endParaRPr lang="en-US" sz="900" dirty="0"/>
           </a:p>
@@ -15581,14 +15845,14 @@
       </p:sp>
       <p:sp>
         <p:nvSpPr>
-          <p:cNvPr id="42" name="Shape 40"/>
-          <p:cNvSpPr/>
-          <p:nvPr/>
-        </p:nvSpPr>
-        <p:spPr>
-          <a:xfrm>
-            <a:off x="4129430" y="4169664"/>
-            <a:ext cx="676656" cy="475488"/>
+          <p:cNvPr id="43" name="Shape 41"/>
+          <p:cNvSpPr/>
+          <p:nvPr/>
+        </p:nvSpPr>
+        <p:spPr>
+          <a:xfrm>
+            <a:off x="6668262" y="4169664"/>
+            <a:ext cx="685800" cy="475488"/>
           </a:xfrm>
           <a:prstGeom prst="rect">
             <a:avLst>
@@ -15608,14 +15872,14 @@
       </p:sp>
       <p:sp>
         <p:nvSpPr>
-          <p:cNvPr id="43" name="Text 41"/>
-          <p:cNvSpPr/>
-          <p:nvPr/>
-        </p:nvSpPr>
-        <p:spPr>
-          <a:xfrm>
-            <a:off x="4129430" y="4169664"/>
-            <a:ext cx="676656" cy="475488"/>
+          <p:cNvPr id="44" name="Text 42"/>
+          <p:cNvSpPr/>
+          <p:nvPr/>
+        </p:nvSpPr>
+        <p:spPr>
+          <a:xfrm>
+            <a:off x="6668262" y="4169664"/>
+            <a:ext cx="685800" cy="475488"/>
           </a:xfrm>
           <a:prstGeom prst="rect">
             <a:avLst/>
@@ -15639,7 +15903,7 @@
                 <a:ea typeface="Trebuchet MS" pitchFamily="34" charset="-122"/>
                 <a:cs typeface="Trebuchet MS" pitchFamily="34" charset="-120"/>
               </a:rPr>
-              <a:t>s</a:t>
+              <a:t>e</a:t>
             </a:r>
             <a:endParaRPr lang="en-US" sz="900" dirty="0"/>
           </a:p>
@@ -15647,14 +15911,14 @@
       </p:sp>
       <p:sp>
         <p:nvSpPr>
-          <p:cNvPr id="44" name="Shape 42"/>
-          <p:cNvSpPr/>
-          <p:nvPr/>
-        </p:nvSpPr>
-        <p:spPr>
-          <a:xfrm>
-            <a:off x="4855464" y="4169664"/>
-            <a:ext cx="676656" cy="475488"/>
+          <p:cNvPr id="45" name="Shape 43"/>
+          <p:cNvSpPr/>
+          <p:nvPr/>
+        </p:nvSpPr>
+        <p:spPr>
+          <a:xfrm>
+            <a:off x="7576947" y="4169664"/>
+            <a:ext cx="685800" cy="475488"/>
           </a:xfrm>
           <a:prstGeom prst="rect">
             <a:avLst>
@@ -15674,14 +15938,14 @@
       </p:sp>
       <p:sp>
         <p:nvSpPr>
-          <p:cNvPr id="45" name="Text 43"/>
-          <p:cNvSpPr/>
-          <p:nvPr/>
-        </p:nvSpPr>
-        <p:spPr>
-          <a:xfrm>
-            <a:off x="4855464" y="4169664"/>
-            <a:ext cx="676656" cy="475488"/>
+          <p:cNvPr id="46" name="Text 44"/>
+          <p:cNvSpPr/>
+          <p:nvPr/>
+        </p:nvSpPr>
+        <p:spPr>
+          <a:xfrm>
+            <a:off x="7576947" y="4169664"/>
+            <a:ext cx="685800" cy="475488"/>
           </a:xfrm>
           <a:prstGeom prst="rect">
             <a:avLst/>
@@ -15705,271 +15969,7 @@
                 <a:ea typeface="Trebuchet MS" pitchFamily="34" charset="-122"/>
                 <a:cs typeface="Trebuchet MS" pitchFamily="34" charset="-120"/>
               </a:rPr>
-              <a:t>t</a:t>
-            </a:r>
-            <a:endParaRPr lang="en-US" sz="900" dirty="0"/>
-          </a:p>
-        </p:txBody>
-      </p:sp>
-      <p:sp>
-        <p:nvSpPr>
-          <p:cNvPr id="46" name="Shape 44"/>
-          <p:cNvSpPr/>
-          <p:nvPr/>
-        </p:nvSpPr>
-        <p:spPr>
-          <a:xfrm>
-            <a:off x="5581498" y="4169664"/>
-            <a:ext cx="676656" cy="475488"/>
-          </a:xfrm>
-          <a:prstGeom prst="rect">
-            <a:avLst>
-              <a:gd name="adj" fmla="val 7692"/>
-            </a:avLst>
-          </a:prstGeom>
-          <a:solidFill>
-            <a:srgbClr val="FFFFFF"/>
-          </a:solidFill>
-          <a:ln w="12700">
-            <a:solidFill>
-              <a:srgbClr val="DB2777"/>
-            </a:solidFill>
-            <a:prstDash val="solid"/>
-          </a:ln>
-        </p:spPr>
-      </p:sp>
-      <p:sp>
-        <p:nvSpPr>
-          <p:cNvPr id="47" name="Text 45"/>
-          <p:cNvSpPr/>
-          <p:nvPr/>
-        </p:nvSpPr>
-        <p:spPr>
-          <a:xfrm>
-            <a:off x="5581498" y="4169664"/>
-            <a:ext cx="676656" cy="475488"/>
-          </a:xfrm>
-          <a:prstGeom prst="rect">
-            <a:avLst/>
-          </a:prstGeom>
-          <a:noFill/>
-          <a:ln/>
-        </p:spPr>
-        <p:txBody>
-          <a:bodyPr wrap="square" lIns="0" tIns="0" rIns="0" bIns="0" rtlCol="0" anchor="ctr"/>
-          <a:lstStyle/>
-          <a:p>
-            <a:pPr algn="ctr" indent="0" marL="0">
-              <a:buNone/>
-            </a:pPr>
-            <a:r>
-              <a:rPr lang="en-US" sz="900" b="1" dirty="0">
-                <a:solidFill>
-                  <a:srgbClr val="9D174D"/>
-                </a:solidFill>
-                <a:latin typeface="Trebuchet MS" pitchFamily="34" charset="0"/>
-                <a:ea typeface="Trebuchet MS" pitchFamily="34" charset="-122"/>
-                <a:cs typeface="Trebuchet MS" pitchFamily="34" charset="-120"/>
-              </a:rPr>
-              <a:t>w</a:t>
-            </a:r>
-            <a:endParaRPr lang="en-US" sz="900" dirty="0"/>
-          </a:p>
-        </p:txBody>
-      </p:sp>
-      <p:sp>
-        <p:nvSpPr>
-          <p:cNvPr id="48" name="Shape 46"/>
-          <p:cNvSpPr/>
-          <p:nvPr/>
-        </p:nvSpPr>
-        <p:spPr>
-          <a:xfrm>
-            <a:off x="6307531" y="4169664"/>
-            <a:ext cx="676656" cy="475488"/>
-          </a:xfrm>
-          <a:prstGeom prst="rect">
-            <a:avLst>
-              <a:gd name="adj" fmla="val 7692"/>
-            </a:avLst>
-          </a:prstGeom>
-          <a:solidFill>
-            <a:srgbClr val="FFFFFF"/>
-          </a:solidFill>
-          <a:ln w="12700">
-            <a:solidFill>
-              <a:srgbClr val="DB2777"/>
-            </a:solidFill>
-            <a:prstDash val="solid"/>
-          </a:ln>
-        </p:spPr>
-      </p:sp>
-      <p:sp>
-        <p:nvSpPr>
-          <p:cNvPr id="49" name="Text 47"/>
-          <p:cNvSpPr/>
-          <p:nvPr/>
-        </p:nvSpPr>
-        <p:spPr>
-          <a:xfrm>
-            <a:off x="6307531" y="4169664"/>
-            <a:ext cx="676656" cy="475488"/>
-          </a:xfrm>
-          <a:prstGeom prst="rect">
-            <a:avLst/>
-          </a:prstGeom>
-          <a:noFill/>
-          <a:ln/>
-        </p:spPr>
-        <p:txBody>
-          <a:bodyPr wrap="square" lIns="0" tIns="0" rIns="0" bIns="0" rtlCol="0" anchor="ctr"/>
-          <a:lstStyle/>
-          <a:p>
-            <a:pPr algn="ctr" indent="0" marL="0">
-              <a:buNone/>
-            </a:pPr>
-            <a:r>
-              <a:rPr lang="en-US" sz="900" b="1" dirty="0">
-                <a:solidFill>
-                  <a:srgbClr val="9D174D"/>
-                </a:solidFill>
-                <a:latin typeface="Trebuchet MS" pitchFamily="34" charset="0"/>
-                <a:ea typeface="Trebuchet MS" pitchFamily="34" charset="-122"/>
-                <a:cs typeface="Trebuchet MS" pitchFamily="34" charset="-120"/>
-              </a:rPr>
-              <a:t>or</a:t>
-            </a:r>
-            <a:endParaRPr lang="en-US" sz="900" dirty="0"/>
-          </a:p>
-        </p:txBody>
-      </p:sp>
-      <p:sp>
-        <p:nvSpPr>
-          <p:cNvPr id="50" name="Shape 48"/>
-          <p:cNvSpPr/>
-          <p:nvPr/>
-        </p:nvSpPr>
-        <p:spPr>
-          <a:xfrm>
-            <a:off x="7033565" y="4169664"/>
-            <a:ext cx="676656" cy="475488"/>
-          </a:xfrm>
-          <a:prstGeom prst="rect">
-            <a:avLst>
-              <a:gd name="adj" fmla="val 7692"/>
-            </a:avLst>
-          </a:prstGeom>
-          <a:solidFill>
-            <a:srgbClr val="FFFFFF"/>
-          </a:solidFill>
-          <a:ln w="12700">
-            <a:solidFill>
-              <a:srgbClr val="DB2777"/>
-            </a:solidFill>
-            <a:prstDash val="solid"/>
-          </a:ln>
-        </p:spPr>
-      </p:sp>
-      <p:sp>
-        <p:nvSpPr>
-          <p:cNvPr id="51" name="Text 49"/>
-          <p:cNvSpPr/>
-          <p:nvPr/>
-        </p:nvSpPr>
-        <p:spPr>
-          <a:xfrm>
-            <a:off x="7033565" y="4169664"/>
-            <a:ext cx="676656" cy="475488"/>
-          </a:xfrm>
-          <a:prstGeom prst="rect">
-            <a:avLst/>
-          </a:prstGeom>
-          <a:noFill/>
-          <a:ln/>
-        </p:spPr>
-        <p:txBody>
-          <a:bodyPr wrap="square" lIns="0" tIns="0" rIns="0" bIns="0" rtlCol="0" anchor="ctr"/>
-          <a:lstStyle/>
-          <a:p>
-            <a:pPr algn="ctr" indent="0" marL="0">
-              <a:buNone/>
-            </a:pPr>
-            <a:r>
-              <a:rPr lang="en-US" sz="900" b="1" dirty="0">
-                <a:solidFill>
-                  <a:srgbClr val="9D174D"/>
-                </a:solidFill>
-                <a:latin typeface="Trebuchet MS" pitchFamily="34" charset="0"/>
-                <a:ea typeface="Trebuchet MS" pitchFamily="34" charset="-122"/>
-                <a:cs typeface="Trebuchet MS" pitchFamily="34" charset="-120"/>
-              </a:rPr>
-              <a:t>th</a:t>
-            </a:r>
-            <a:endParaRPr lang="en-US" sz="900" dirty="0"/>
-          </a:p>
-        </p:txBody>
-      </p:sp>
-      <p:sp>
-        <p:nvSpPr>
-          <p:cNvPr id="52" name="Shape 50"/>
-          <p:cNvSpPr/>
-          <p:nvPr/>
-        </p:nvSpPr>
-        <p:spPr>
-          <a:xfrm>
-            <a:off x="7759598" y="4169664"/>
-            <a:ext cx="676656" cy="475488"/>
-          </a:xfrm>
-          <a:prstGeom prst="rect">
-            <a:avLst>
-              <a:gd name="adj" fmla="val 7692"/>
-            </a:avLst>
-          </a:prstGeom>
-          <a:solidFill>
-            <a:srgbClr val="FFFFFF"/>
-          </a:solidFill>
-          <a:ln w="12700">
-            <a:solidFill>
-              <a:srgbClr val="DB2777"/>
-            </a:solidFill>
-            <a:prstDash val="solid"/>
-          </a:ln>
-        </p:spPr>
-      </p:sp>
-      <p:sp>
-        <p:nvSpPr>
-          <p:cNvPr id="53" name="Text 51"/>
-          <p:cNvSpPr/>
-          <p:nvPr/>
-        </p:nvSpPr>
-        <p:spPr>
-          <a:xfrm>
-            <a:off x="7759598" y="4169664"/>
-            <a:ext cx="676656" cy="475488"/>
-          </a:xfrm>
-          <a:prstGeom prst="rect">
-            <a:avLst/>
-          </a:prstGeom>
-          <a:noFill/>
-          <a:ln/>
-        </p:spPr>
-        <p:txBody>
-          <a:bodyPr wrap="square" lIns="0" tIns="0" rIns="0" bIns="0" rtlCol="0" anchor="ctr"/>
-          <a:lstStyle/>
-          <a:p>
-            <a:pPr algn="ctr" indent="0" marL="0">
-              <a:buNone/>
-            </a:pPr>
-            <a:r>
-              <a:rPr lang="en-US" sz="900" b="1" dirty="0">
-                <a:solidFill>
-                  <a:srgbClr val="9D174D"/>
-                </a:solidFill>
-                <a:latin typeface="Trebuchet MS" pitchFamily="34" charset="0"/>
-                <a:ea typeface="Trebuchet MS" pitchFamily="34" charset="-122"/>
-                <a:cs typeface="Trebuchet MS" pitchFamily="34" charset="-120"/>
-              </a:rPr>
-              <a:t>y</a:t>
+              <a:t>d</a:t>
             </a:r>
             <a:endParaRPr lang="en-US" sz="900" dirty="0"/>
           </a:p>
@@ -17295,7 +17295,7 @@
                 <a:ea typeface="Calibri" pitchFamily="34" charset="-122"/>
                 <a:cs typeface="Calibri" pitchFamily="34" charset="-120"/>
               </a:rPr>
-              <a:t>Although she was </a:t>
+              <a:t>She was </a:t>
             </a:r>
             <a:pPr algn="l" indent="0" marL="0">
               <a:buNone/>
@@ -17312,7 +17312,7 @@
                 <a:ea typeface="Calibri" pitchFamily="34" charset="-122"/>
                 <a:cs typeface="Calibri" pitchFamily="34" charset="-120"/>
               </a:rPr>
-              <a:t>distrustful</a:t>
+              <a:t>mistrustful</a:t>
             </a:r>
             <a:pPr algn="l" indent="0" marL="0">
               <a:buNone/>
@@ -17326,7 +17326,7 @@
                 <a:ea typeface="Calibri" pitchFamily="34" charset="-122"/>
                 <a:cs typeface="Calibri" pitchFamily="34" charset="-120"/>
               </a:rPr>
-              <a:t> at first, she soon found him to be a </a:t>
+              <a:t> of the plan, but tried to act </a:t>
             </a:r>
             <a:pPr algn="l" indent="0" marL="0">
               <a:buNone/>
@@ -17343,7 +17343,7 @@
                 <a:ea typeface="Calibri" pitchFamily="34" charset="-122"/>
                 <a:cs typeface="Calibri" pitchFamily="34" charset="-120"/>
               </a:rPr>
-              <a:t>trustworthy</a:t>
+              <a:t>trustingly</a:t>
             </a:r>
             <a:pPr algn="l" indent="0" marL="0">
               <a:buNone/>
@@ -17357,7 +17357,7 @@
                 <a:ea typeface="Calibri" pitchFamily="34" charset="-122"/>
                 <a:cs typeface="Calibri" pitchFamily="34" charset="-120"/>
               </a:rPr>
-              <a:t> and </a:t>
+              <a:t>; in the end, her </a:t>
             </a:r>
             <a:pPr algn="l" indent="0" marL="0">
               <a:buNone/>
@@ -17374,7 +17374,7 @@
                 <a:ea typeface="Calibri" pitchFamily="34" charset="-122"/>
                 <a:cs typeface="Calibri" pitchFamily="34" charset="-120"/>
               </a:rPr>
-              <a:t>trusting</a:t>
+              <a:t>distrust</a:t>
             </a:r>
             <a:pPr algn="l" indent="0" marL="0">
               <a:buNone/>
@@ -17388,7 +17388,7 @@
                 <a:ea typeface="Calibri" pitchFamily="34" charset="-122"/>
                 <a:cs typeface="Calibri" pitchFamily="34" charset="-120"/>
               </a:rPr>
-              <a:t> friend.</a:t>
+              <a:t> proved to be right.</a:t>
             </a:r>
             <a:endParaRPr lang="en-US" sz="1800" dirty="0"/>
           </a:p>
@@ -17543,7 +17543,7 @@
                 <a:ea typeface="Trebuchet MS" pitchFamily="34" charset="-122"/>
                 <a:cs typeface="Trebuchet MS" pitchFamily="34" charset="-120"/>
               </a:rPr>
-              <a:t>distrustful</a:t>
+              <a:t>mistrustful</a:t>
             </a:r>
             <a:endParaRPr lang="en-US" sz="1400" dirty="0"/>
           </a:p>
@@ -17671,7 +17671,7 @@
                 <a:ea typeface="Trebuchet MS" pitchFamily="34" charset="-122"/>
                 <a:cs typeface="Trebuchet MS" pitchFamily="34" charset="-120"/>
               </a:rPr>
-              <a:t>trustworthy</a:t>
+              <a:t>trustingly</a:t>
             </a:r>
             <a:endParaRPr lang="en-US" sz="1400" dirty="0"/>
           </a:p>
@@ -17799,7 +17799,7 @@
                 <a:ea typeface="Trebuchet MS" pitchFamily="34" charset="-122"/>
                 <a:cs typeface="Trebuchet MS" pitchFamily="34" charset="-120"/>
               </a:rPr>
-              <a:t>trusting</a:t>
+              <a:t>distrust</a:t>
             </a:r>
             <a:endParaRPr lang="en-US" sz="1400" dirty="0"/>
           </a:p>
@@ -18269,7 +18269,7 @@
                 <a:ea typeface="Trebuchet MS" pitchFamily="34" charset="-122"/>
                 <a:cs typeface="Trebuchet MS" pitchFamily="34" charset="-120"/>
               </a:rPr>
-              <a:t>distrustful</a:t>
+              <a:t>mistrustful</a:t>
             </a:r>
             <a:endParaRPr lang="en-US" sz="2800" dirty="0"/>
           </a:p>
@@ -19096,7 +19096,7 @@
                 <a:ea typeface="Trebuchet MS" pitchFamily="34" charset="-122"/>
                 <a:cs typeface="Trebuchet MS" pitchFamily="34" charset="-120"/>
               </a:rPr>
-              <a:t>distrustful</a:t>
+              <a:t>mistrustful</a:t>
             </a:r>
             <a:endParaRPr lang="en-US" sz="2800" dirty="0"/>
           </a:p>
@@ -19235,7 +19235,7 @@
                 <a:ea typeface="Trebuchet MS" pitchFamily="34" charset="-122"/>
                 <a:cs typeface="Trebuchet MS" pitchFamily="34" charset="-120"/>
               </a:rPr>
-              <a:t>dis</a:t>
+              <a:t>mis</a:t>
             </a:r>
             <a:endParaRPr lang="en-US" sz="1300" dirty="0"/>
           </a:p>
@@ -19274,7 +19274,7 @@
                 <a:ea typeface="Calibri" pitchFamily="34" charset="-122"/>
                 <a:cs typeface="Calibri" pitchFamily="34" charset="-120"/>
               </a:rPr>
-              <a:t>not, opposite of</a:t>
+              <a:t>wrongly, not</a:t>
             </a:r>
             <a:endParaRPr lang="en-US" sz="850" dirty="0"/>
           </a:p>
@@ -19498,7 +19498,7 @@
                 <a:ea typeface="Calibri" pitchFamily="34" charset="-122"/>
                 <a:cs typeface="Calibri" pitchFamily="34" charset="-120"/>
               </a:rPr>
-              <a:t>full of</a:t>
+              <a:t>full of, having</a:t>
             </a:r>
             <a:endParaRPr lang="en-US" sz="850" dirty="0"/>
           </a:p>
@@ -20193,7 +20193,7 @@
                 <a:ea typeface="Trebuchet MS" pitchFamily="34" charset="-122"/>
                 <a:cs typeface="Trebuchet MS" pitchFamily="34" charset="-120"/>
               </a:rPr>
-              <a:t>distrustful</a:t>
+              <a:t>mistrustful</a:t>
             </a:r>
             <a:endParaRPr lang="en-US" sz="2800" dirty="0"/>
           </a:p>
@@ -20332,7 +20332,7 @@
                 <a:ea typeface="Trebuchet MS" pitchFamily="34" charset="-122"/>
                 <a:cs typeface="Trebuchet MS" pitchFamily="34" charset="-120"/>
               </a:rPr>
-              <a:t>dis</a:t>
+              <a:t>mis</a:t>
             </a:r>
             <a:endParaRPr lang="en-US" sz="1300" dirty="0"/>
           </a:p>
@@ -20371,7 +20371,7 @@
                 <a:ea typeface="Calibri" pitchFamily="34" charset="-122"/>
                 <a:cs typeface="Calibri" pitchFamily="34" charset="-120"/>
               </a:rPr>
-              <a:t>not, opposite of</a:t>
+              <a:t>wrongly, not</a:t>
             </a:r>
             <a:endParaRPr lang="en-US" sz="850" dirty="0"/>
           </a:p>
@@ -20595,7 +20595,7 @@
                 <a:ea typeface="Calibri" pitchFamily="34" charset="-122"/>
                 <a:cs typeface="Calibri" pitchFamily="34" charset="-120"/>
               </a:rPr>
-              <a:t>full of</a:t>
+              <a:t>full of, having</a:t>
             </a:r>
             <a:endParaRPr lang="en-US" sz="850" dirty="0"/>
           </a:p>
@@ -20754,7 +20754,7 @@
                 <a:ea typeface="Trebuchet MS" pitchFamily="34" charset="-122"/>
                 <a:cs typeface="Trebuchet MS" pitchFamily="34" charset="-120"/>
               </a:rPr>
-              <a:t>dis</a:t>
+              <a:t>mis</a:t>
             </a:r>
             <a:endParaRPr lang="en-US" sz="1400" dirty="0"/>
           </a:p>
@@ -21527,7 +21527,7 @@
                 <a:ea typeface="Trebuchet MS" pitchFamily="34" charset="-122"/>
                 <a:cs typeface="Trebuchet MS" pitchFamily="34" charset="-120"/>
               </a:rPr>
-              <a:t>distrustful</a:t>
+              <a:t>mistrustful</a:t>
             </a:r>
             <a:endParaRPr lang="en-US" sz="2800" dirty="0"/>
           </a:p>
@@ -21666,7 +21666,7 @@
                 <a:ea typeface="Trebuchet MS" pitchFamily="34" charset="-122"/>
                 <a:cs typeface="Trebuchet MS" pitchFamily="34" charset="-120"/>
               </a:rPr>
-              <a:t>dis</a:t>
+              <a:t>mis</a:t>
             </a:r>
             <a:endParaRPr lang="en-US" sz="1300" dirty="0"/>
           </a:p>
@@ -21705,7 +21705,7 @@
                 <a:ea typeface="Calibri" pitchFamily="34" charset="-122"/>
                 <a:cs typeface="Calibri" pitchFamily="34" charset="-120"/>
               </a:rPr>
-              <a:t>not, opposite of</a:t>
+              <a:t>wrongly, not</a:t>
             </a:r>
             <a:endParaRPr lang="en-US" sz="850" dirty="0"/>
           </a:p>
@@ -21929,7 +21929,7 @@
                 <a:ea typeface="Calibri" pitchFamily="34" charset="-122"/>
                 <a:cs typeface="Calibri" pitchFamily="34" charset="-120"/>
               </a:rPr>
-              <a:t>full of</a:t>
+              <a:t>full of, having</a:t>
             </a:r>
             <a:endParaRPr lang="en-US" sz="850" dirty="0"/>
           </a:p>
@@ -22088,7 +22088,7 @@
                 <a:ea typeface="Trebuchet MS" pitchFamily="34" charset="-122"/>
                 <a:cs typeface="Trebuchet MS" pitchFamily="34" charset="-120"/>
               </a:rPr>
-              <a:t>dis</a:t>
+              <a:t>mis</a:t>
             </a:r>
             <a:endParaRPr lang="en-US" sz="1400" dirty="0"/>
           </a:p>
@@ -22457,7 +22457,7 @@
                 <a:ea typeface="Trebuchet MS" pitchFamily="34" charset="-122"/>
                 <a:cs typeface="Trebuchet MS" pitchFamily="34" charset="-120"/>
               </a:rPr>
-              <a:t>d</a:t>
+              <a:t>m</a:t>
             </a:r>
             <a:endParaRPr lang="en-US" sz="900" dirty="0"/>
           </a:p>
@@ -23548,7 +23548,7 @@
                 <a:ea typeface="Trebuchet MS" pitchFamily="34" charset="-122"/>
                 <a:cs typeface="Trebuchet MS" pitchFamily="34" charset="-120"/>
               </a:rPr>
-              <a:t>trustworthy</a:t>
+              <a:t>trustingly</a:t>
             </a:r>
             <a:endParaRPr lang="en-US" sz="2800" dirty="0"/>
           </a:p>
@@ -24375,7 +24375,7 @@
                 <a:ea typeface="Trebuchet MS" pitchFamily="34" charset="-122"/>
                 <a:cs typeface="Trebuchet MS" pitchFamily="34" charset="-120"/>
               </a:rPr>
-              <a:t>trustworthy</a:t>
+              <a:t>trustingly</a:t>
             </a:r>
             <a:endParaRPr lang="en-US" sz="2800" dirty="0"/>
           </a:p>
@@ -24455,7 +24455,7 @@
         </p:nvSpPr>
         <p:spPr>
           <a:xfrm>
-            <a:off x="2938272" y="2258568"/>
+            <a:off x="2221992" y="2258568"/>
             <a:ext cx="1828800" cy="292608"/>
           </a:xfrm>
           <a:prstGeom prst="rect">
@@ -24489,7 +24489,7 @@
         </p:nvSpPr>
         <p:spPr>
           <a:xfrm>
-            <a:off x="2938272" y="2258568"/>
+            <a:off x="2221992" y="2258568"/>
             <a:ext cx="1828800" cy="292608"/>
           </a:xfrm>
           <a:prstGeom prst="rect">
@@ -24528,7 +24528,7 @@
         </p:nvSpPr>
         <p:spPr>
           <a:xfrm>
-            <a:off x="2938272" y="2569464"/>
+            <a:off x="2221992" y="2569464"/>
             <a:ext cx="1828800" cy="201168"/>
           </a:xfrm>
           <a:prstGeom prst="rect">
@@ -24567,7 +24567,7 @@
         </p:nvSpPr>
         <p:spPr>
           <a:xfrm>
-            <a:off x="5803392" y="2258568"/>
+            <a:off x="4370832" y="2258568"/>
             <a:ext cx="1828800" cy="292608"/>
           </a:xfrm>
           <a:prstGeom prst="rect">
@@ -24601,7 +24601,7 @@
         </p:nvSpPr>
         <p:spPr>
           <a:xfrm>
-            <a:off x="5803392" y="2258568"/>
+            <a:off x="4370832" y="2258568"/>
             <a:ext cx="1828800" cy="292608"/>
           </a:xfrm>
           <a:prstGeom prst="rect">
@@ -24626,7 +24626,7 @@
                 <a:ea typeface="Trebuchet MS" pitchFamily="34" charset="-122"/>
                 <a:cs typeface="Trebuchet MS" pitchFamily="34" charset="-120"/>
               </a:rPr>
-              <a:t>worthy</a:t>
+              <a:t>ing</a:t>
             </a:r>
             <a:endParaRPr lang="en-US" sz="1300" dirty="0"/>
           </a:p>
@@ -24640,7 +24640,7 @@
         </p:nvSpPr>
         <p:spPr>
           <a:xfrm>
-            <a:off x="5803392" y="2569464"/>
+            <a:off x="4370832" y="2569464"/>
             <a:ext cx="1828800" cy="201168"/>
           </a:xfrm>
           <a:prstGeom prst="rect">
@@ -24665,7 +24665,7 @@
                 <a:ea typeface="Calibri" pitchFamily="34" charset="-122"/>
                 <a:cs typeface="Calibri" pitchFamily="34" charset="-120"/>
               </a:rPr>
-              <a:t>deserving of</a:t>
+              <a:t>in the manner of</a:t>
             </a:r>
             <a:endParaRPr lang="en-US" sz="850" dirty="0"/>
           </a:p>
@@ -24674,6 +24674,118 @@
       <p:sp>
         <p:nvSpPr>
           <p:cNvPr id="22" name="Shape 20"/>
+          <p:cNvSpPr/>
+          <p:nvPr/>
+        </p:nvSpPr>
+        <p:spPr>
+          <a:xfrm>
+            <a:off x="6519672" y="2258568"/>
+            <a:ext cx="1828800" cy="292608"/>
+          </a:xfrm>
+          <a:prstGeom prst="rect">
+            <a:avLst>
+              <a:gd name="adj" fmla="val 25000"/>
+            </a:avLst>
+          </a:prstGeom>
+          <a:solidFill>
+            <a:srgbClr val="FCE7F3"/>
+          </a:solidFill>
+          <a:ln w="19050">
+            <a:solidFill>
+              <a:srgbClr val="DB2777"/>
+            </a:solidFill>
+            <a:prstDash val="solid"/>
+          </a:ln>
+          <a:effectLst>
+            <a:outerShdw sx="100000" sy="100000" kx="0" ky="0" algn="bl" rotWithShape="0" blurRad="101600" dist="38100" dir="8100000">
+              <a:srgbClr val="000000">
+                <a:alpha val="12000"/>
+              </a:srgbClr>
+            </a:outerShdw>
+          </a:effectLst>
+        </p:spPr>
+      </p:sp>
+      <p:sp>
+        <p:nvSpPr>
+          <p:cNvPr id="23" name="Text 21"/>
+          <p:cNvSpPr/>
+          <p:nvPr/>
+        </p:nvSpPr>
+        <p:spPr>
+          <a:xfrm>
+            <a:off x="6519672" y="2258568"/>
+            <a:ext cx="1828800" cy="292608"/>
+          </a:xfrm>
+          <a:prstGeom prst="rect">
+            <a:avLst/>
+          </a:prstGeom>
+          <a:noFill/>
+          <a:ln/>
+        </p:spPr>
+        <p:txBody>
+          <a:bodyPr wrap="square" lIns="0" tIns="0" rIns="0" bIns="0" rtlCol="0" anchor="ctr"/>
+          <a:lstStyle/>
+          <a:p>
+            <a:pPr algn="ctr" indent="0" marL="0">
+              <a:buNone/>
+            </a:pPr>
+            <a:r>
+              <a:rPr lang="en-US" sz="1300" b="1" dirty="0">
+                <a:solidFill>
+                  <a:srgbClr val="9D174D"/>
+                </a:solidFill>
+                <a:latin typeface="Trebuchet MS" pitchFamily="34" charset="0"/>
+                <a:ea typeface="Trebuchet MS" pitchFamily="34" charset="-122"/>
+                <a:cs typeface="Trebuchet MS" pitchFamily="34" charset="-120"/>
+              </a:rPr>
+              <a:t>ly</a:t>
+            </a:r>
+            <a:endParaRPr lang="en-US" sz="1300" dirty="0"/>
+          </a:p>
+        </p:txBody>
+      </p:sp>
+      <p:sp>
+        <p:nvSpPr>
+          <p:cNvPr id="24" name="Text 22"/>
+          <p:cNvSpPr/>
+          <p:nvPr/>
+        </p:nvSpPr>
+        <p:spPr>
+          <a:xfrm>
+            <a:off x="6519672" y="2569464"/>
+            <a:ext cx="1828800" cy="201168"/>
+          </a:xfrm>
+          <a:prstGeom prst="rect">
+            <a:avLst/>
+          </a:prstGeom>
+          <a:noFill/>
+          <a:ln/>
+        </p:spPr>
+        <p:txBody>
+          <a:bodyPr wrap="square" lIns="0" tIns="0" rIns="0" bIns="0" rtlCol="0" anchor="t"/>
+          <a:lstStyle/>
+          <a:p>
+            <a:pPr algn="ctr" indent="0" marL="0">
+              <a:buNone/>
+            </a:pPr>
+            <a:r>
+              <a:rPr lang="en-US" sz="850" dirty="0">
+                <a:solidFill>
+                  <a:srgbClr val="475569"/>
+                </a:solidFill>
+                <a:latin typeface="Calibri" pitchFamily="34" charset="0"/>
+                <a:ea typeface="Calibri" pitchFamily="34" charset="-122"/>
+                <a:cs typeface="Calibri" pitchFamily="34" charset="-120"/>
+              </a:rPr>
+              <a:t>in a certain way</a:t>
+            </a:r>
+            <a:endParaRPr lang="en-US" sz="850" dirty="0"/>
+          </a:p>
+        </p:txBody>
+      </p:sp>
+      <p:sp>
+        <p:nvSpPr>
+          <p:cNvPr id="25" name="Shape 23"/>
           <p:cNvSpPr/>
           <p:nvPr/>
         </p:nvSpPr>
@@ -24700,7 +24812,7 @@
       </p:sp>
       <p:sp>
         <p:nvSpPr>
-          <p:cNvPr id="23" name="Text 21"/>
+          <p:cNvPr id="26" name="Text 24"/>
           <p:cNvSpPr/>
           <p:nvPr/>
         </p:nvSpPr>
@@ -24739,7 +24851,7 @@
       </p:sp>
       <p:sp>
         <p:nvSpPr>
-          <p:cNvPr id="24" name="Shape 22"/>
+          <p:cNvPr id="27" name="Shape 25"/>
           <p:cNvSpPr/>
           <p:nvPr/>
         </p:nvSpPr>
@@ -24766,7 +24878,7 @@
       </p:sp>
       <p:sp>
         <p:nvSpPr>
-          <p:cNvPr id="25" name="Text 23"/>
+          <p:cNvPr id="28" name="Text 26"/>
           <p:cNvSpPr/>
           <p:nvPr/>
         </p:nvSpPr>
@@ -24805,7 +24917,7 @@
       </p:sp>
       <p:sp>
         <p:nvSpPr>
-          <p:cNvPr id="26" name="Shape 24"/>
+          <p:cNvPr id="29" name="Shape 27"/>
           <p:cNvSpPr/>
           <p:nvPr/>
         </p:nvSpPr>
@@ -24832,7 +24944,7 @@
       </p:sp>
       <p:sp>
         <p:nvSpPr>
-          <p:cNvPr id="27" name="Text 25"/>
+          <p:cNvPr id="30" name="Text 28"/>
           <p:cNvSpPr/>
           <p:nvPr/>
         </p:nvSpPr>
@@ -24871,7 +24983,7 @@
       </p:sp>
       <p:sp>
         <p:nvSpPr>
-          <p:cNvPr id="28" name="Shape 26"/>
+          <p:cNvPr id="31" name="Shape 29"/>
           <p:cNvSpPr/>
           <p:nvPr/>
         </p:nvSpPr>
@@ -24898,7 +25010,7 @@
       </p:sp>
       <p:sp>
         <p:nvSpPr>
-          <p:cNvPr id="29" name="Text 27"/>
+          <p:cNvPr id="32" name="Text 30"/>
           <p:cNvSpPr/>
           <p:nvPr/>
         </p:nvSpPr>
@@ -26079,7 +26191,7 @@
                 <a:ea typeface="Trebuchet MS" pitchFamily="34" charset="-122"/>
                 <a:cs typeface="Trebuchet MS" pitchFamily="34" charset="-120"/>
               </a:rPr>
-              <a:t>trustworthy</a:t>
+              <a:t>trustingly</a:t>
             </a:r>
             <a:endParaRPr lang="en-US" sz="2800" dirty="0"/>
           </a:p>
@@ -26159,7 +26271,7 @@
         </p:nvSpPr>
         <p:spPr>
           <a:xfrm>
-            <a:off x="2938272" y="2258568"/>
+            <a:off x="2221992" y="2258568"/>
             <a:ext cx="1828800" cy="292608"/>
           </a:xfrm>
           <a:prstGeom prst="rect">
@@ -26193,7 +26305,7 @@
         </p:nvSpPr>
         <p:spPr>
           <a:xfrm>
-            <a:off x="2938272" y="2258568"/>
+            <a:off x="2221992" y="2258568"/>
             <a:ext cx="1828800" cy="292608"/>
           </a:xfrm>
           <a:prstGeom prst="rect">
@@ -26232,7 +26344,7 @@
         </p:nvSpPr>
         <p:spPr>
           <a:xfrm>
-            <a:off x="2938272" y="2569464"/>
+            <a:off x="2221992" y="2569464"/>
             <a:ext cx="1828800" cy="201168"/>
           </a:xfrm>
           <a:prstGeom prst="rect">
@@ -26271,7 +26383,7 @@
         </p:nvSpPr>
         <p:spPr>
           <a:xfrm>
-            <a:off x="5803392" y="2258568"/>
+            <a:off x="4370832" y="2258568"/>
             <a:ext cx="1828800" cy="292608"/>
           </a:xfrm>
           <a:prstGeom prst="rect">
@@ -26305,7 +26417,7 @@
         </p:nvSpPr>
         <p:spPr>
           <a:xfrm>
-            <a:off x="5803392" y="2258568"/>
+            <a:off x="4370832" y="2258568"/>
             <a:ext cx="1828800" cy="292608"/>
           </a:xfrm>
           <a:prstGeom prst="rect">
@@ -26330,7 +26442,7 @@
                 <a:ea typeface="Trebuchet MS" pitchFamily="34" charset="-122"/>
                 <a:cs typeface="Trebuchet MS" pitchFamily="34" charset="-120"/>
               </a:rPr>
-              <a:t>worthy</a:t>
+              <a:t>ing</a:t>
             </a:r>
             <a:endParaRPr lang="en-US" sz="1300" dirty="0"/>
           </a:p>
@@ -26344,7 +26456,7 @@
         </p:nvSpPr>
         <p:spPr>
           <a:xfrm>
-            <a:off x="5803392" y="2569464"/>
+            <a:off x="4370832" y="2569464"/>
             <a:ext cx="1828800" cy="201168"/>
           </a:xfrm>
           <a:prstGeom prst="rect">
@@ -26369,7 +26481,7 @@
                 <a:ea typeface="Calibri" pitchFamily="34" charset="-122"/>
                 <a:cs typeface="Calibri" pitchFamily="34" charset="-120"/>
               </a:rPr>
-              <a:t>deserving of</a:t>
+              <a:t>in the manner of</a:t>
             </a:r>
             <a:endParaRPr lang="en-US" sz="850" dirty="0"/>
           </a:p>
@@ -26378,6 +26490,118 @@
       <p:sp>
         <p:nvSpPr>
           <p:cNvPr id="22" name="Shape 20"/>
+          <p:cNvSpPr/>
+          <p:nvPr/>
+        </p:nvSpPr>
+        <p:spPr>
+          <a:xfrm>
+            <a:off x="6519672" y="2258568"/>
+            <a:ext cx="1828800" cy="292608"/>
+          </a:xfrm>
+          <a:prstGeom prst="rect">
+            <a:avLst>
+              <a:gd name="adj" fmla="val 25000"/>
+            </a:avLst>
+          </a:prstGeom>
+          <a:solidFill>
+            <a:srgbClr val="FCE7F3"/>
+          </a:solidFill>
+          <a:ln w="19050">
+            <a:solidFill>
+              <a:srgbClr val="DB2777"/>
+            </a:solidFill>
+            <a:prstDash val="solid"/>
+          </a:ln>
+          <a:effectLst>
+            <a:outerShdw sx="100000" sy="100000" kx="0" ky="0" algn="bl" rotWithShape="0" blurRad="101600" dist="38100" dir="8100000">
+              <a:srgbClr val="000000">
+                <a:alpha val="12000"/>
+              </a:srgbClr>
+            </a:outerShdw>
+          </a:effectLst>
+        </p:spPr>
+      </p:sp>
+      <p:sp>
+        <p:nvSpPr>
+          <p:cNvPr id="23" name="Text 21"/>
+          <p:cNvSpPr/>
+          <p:nvPr/>
+        </p:nvSpPr>
+        <p:spPr>
+          <a:xfrm>
+            <a:off x="6519672" y="2258568"/>
+            <a:ext cx="1828800" cy="292608"/>
+          </a:xfrm>
+          <a:prstGeom prst="rect">
+            <a:avLst/>
+          </a:prstGeom>
+          <a:noFill/>
+          <a:ln/>
+        </p:spPr>
+        <p:txBody>
+          <a:bodyPr wrap="square" lIns="0" tIns="0" rIns="0" bIns="0" rtlCol="0" anchor="ctr"/>
+          <a:lstStyle/>
+          <a:p>
+            <a:pPr algn="ctr" indent="0" marL="0">
+              <a:buNone/>
+            </a:pPr>
+            <a:r>
+              <a:rPr lang="en-US" sz="1300" b="1" dirty="0">
+                <a:solidFill>
+                  <a:srgbClr val="9D174D"/>
+                </a:solidFill>
+                <a:latin typeface="Trebuchet MS" pitchFamily="34" charset="0"/>
+                <a:ea typeface="Trebuchet MS" pitchFamily="34" charset="-122"/>
+                <a:cs typeface="Trebuchet MS" pitchFamily="34" charset="-120"/>
+              </a:rPr>
+              <a:t>ly</a:t>
+            </a:r>
+            <a:endParaRPr lang="en-US" sz="1300" dirty="0"/>
+          </a:p>
+        </p:txBody>
+      </p:sp>
+      <p:sp>
+        <p:nvSpPr>
+          <p:cNvPr id="24" name="Text 22"/>
+          <p:cNvSpPr/>
+          <p:nvPr/>
+        </p:nvSpPr>
+        <p:spPr>
+          <a:xfrm>
+            <a:off x="6519672" y="2569464"/>
+            <a:ext cx="1828800" cy="201168"/>
+          </a:xfrm>
+          <a:prstGeom prst="rect">
+            <a:avLst/>
+          </a:prstGeom>
+          <a:noFill/>
+          <a:ln/>
+        </p:spPr>
+        <p:txBody>
+          <a:bodyPr wrap="square" lIns="0" tIns="0" rIns="0" bIns="0" rtlCol="0" anchor="t"/>
+          <a:lstStyle/>
+          <a:p>
+            <a:pPr algn="ctr" indent="0" marL="0">
+              <a:buNone/>
+            </a:pPr>
+            <a:r>
+              <a:rPr lang="en-US" sz="850" dirty="0">
+                <a:solidFill>
+                  <a:srgbClr val="475569"/>
+                </a:solidFill>
+                <a:latin typeface="Calibri" pitchFamily="34" charset="0"/>
+                <a:ea typeface="Calibri" pitchFamily="34" charset="-122"/>
+                <a:cs typeface="Calibri" pitchFamily="34" charset="-120"/>
+              </a:rPr>
+              <a:t>in a certain way</a:t>
+            </a:r>
+            <a:endParaRPr lang="en-US" sz="850" dirty="0"/>
+          </a:p>
+        </p:txBody>
+      </p:sp>
+      <p:sp>
+        <p:nvSpPr>
+          <p:cNvPr id="25" name="Shape 23"/>
           <p:cNvSpPr/>
           <p:nvPr/>
         </p:nvSpPr>
@@ -26404,7 +26628,7 @@
       </p:sp>
       <p:sp>
         <p:nvSpPr>
-          <p:cNvPr id="23" name="Text 21"/>
+          <p:cNvPr id="26" name="Text 24"/>
           <p:cNvSpPr/>
           <p:nvPr/>
         </p:nvSpPr>
@@ -26443,7 +26667,7 @@
       </p:sp>
       <p:sp>
         <p:nvSpPr>
-          <p:cNvPr id="24" name="Shape 22"/>
+          <p:cNvPr id="27" name="Shape 25"/>
           <p:cNvSpPr/>
           <p:nvPr/>
         </p:nvSpPr>
@@ -26470,7 +26694,7 @@
       </p:sp>
       <p:sp>
         <p:nvSpPr>
-          <p:cNvPr id="25" name="Shape 23"/>
+          <p:cNvPr id="28" name="Shape 26"/>
           <p:cNvSpPr/>
           <p:nvPr/>
         </p:nvSpPr>
@@ -26497,7 +26721,7 @@
       </p:sp>
       <p:sp>
         <p:nvSpPr>
-          <p:cNvPr id="26" name="Text 24"/>
+          <p:cNvPr id="29" name="Text 27"/>
           <p:cNvSpPr/>
           <p:nvPr/>
         </p:nvSpPr>
@@ -26536,7 +26760,7 @@
       </p:sp>
       <p:sp>
         <p:nvSpPr>
-          <p:cNvPr id="27" name="Text 25"/>
+          <p:cNvPr id="30" name="Text 28"/>
           <p:cNvSpPr/>
           <p:nvPr/>
         </p:nvSpPr>
@@ -26575,7 +26799,7 @@
       </p:sp>
       <p:sp>
         <p:nvSpPr>
-          <p:cNvPr id="28" name="Shape 26"/>
+          <p:cNvPr id="31" name="Shape 29"/>
           <p:cNvSpPr/>
           <p:nvPr/>
         </p:nvSpPr>
@@ -26602,7 +26826,7 @@
       </p:sp>
       <p:sp>
         <p:nvSpPr>
-          <p:cNvPr id="29" name="Text 27"/>
+          <p:cNvPr id="32" name="Text 30"/>
           <p:cNvSpPr/>
           <p:nvPr/>
         </p:nvSpPr>
@@ -26633,7 +26857,7 @@
                 <a:ea typeface="Trebuchet MS" pitchFamily="34" charset="-122"/>
                 <a:cs typeface="Trebuchet MS" pitchFamily="34" charset="-120"/>
               </a:rPr>
-              <a:t>wor</a:t>
+              <a:t>ing</a:t>
             </a:r>
             <a:endParaRPr lang="en-US" sz="1400" dirty="0"/>
           </a:p>
@@ -26641,7 +26865,7 @@
       </p:sp>
       <p:sp>
         <p:nvSpPr>
-          <p:cNvPr id="30" name="Text 28"/>
+          <p:cNvPr id="33" name="Text 31"/>
           <p:cNvSpPr/>
           <p:nvPr/>
         </p:nvSpPr>
@@ -26680,7 +26904,7 @@
       </p:sp>
       <p:sp>
         <p:nvSpPr>
-          <p:cNvPr id="31" name="Shape 29"/>
+          <p:cNvPr id="34" name="Shape 32"/>
           <p:cNvSpPr/>
           <p:nvPr/>
         </p:nvSpPr>
@@ -26707,7 +26931,7 @@
       </p:sp>
       <p:sp>
         <p:nvSpPr>
-          <p:cNvPr id="32" name="Text 30"/>
+          <p:cNvPr id="35" name="Text 33"/>
           <p:cNvSpPr/>
           <p:nvPr/>
         </p:nvSpPr>
@@ -26738,7 +26962,7 @@
                 <a:ea typeface="Trebuchet MS" pitchFamily="34" charset="-122"/>
                 <a:cs typeface="Trebuchet MS" pitchFamily="34" charset="-120"/>
               </a:rPr>
-              <a:t>thy</a:t>
+              <a:t>ly</a:t>
             </a:r>
             <a:endParaRPr lang="en-US" sz="1400" dirty="0"/>
           </a:p>
@@ -26746,7 +26970,7 @@
       </p:sp>
       <p:sp>
         <p:nvSpPr>
-          <p:cNvPr id="33" name="Shape 31"/>
+          <p:cNvPr id="36" name="Shape 34"/>
           <p:cNvSpPr/>
           <p:nvPr/>
         </p:nvSpPr>
@@ -26773,7 +26997,7 @@
       </p:sp>
       <p:sp>
         <p:nvSpPr>
-          <p:cNvPr id="34" name="Text 32"/>
+          <p:cNvPr id="37" name="Text 35"/>
           <p:cNvSpPr/>
           <p:nvPr/>
         </p:nvSpPr>
@@ -26812,7 +27036,7 @@
       </p:sp>
       <p:sp>
         <p:nvSpPr>
-          <p:cNvPr id="35" name="Shape 33"/>
+          <p:cNvPr id="38" name="Shape 36"/>
           <p:cNvSpPr/>
           <p:nvPr/>
         </p:nvSpPr>
@@ -26839,7 +27063,7 @@
       </p:sp>
       <p:sp>
         <p:nvSpPr>
-          <p:cNvPr id="36" name="Text 34"/>
+          <p:cNvPr id="39" name="Text 37"/>
           <p:cNvSpPr/>
           <p:nvPr/>
         </p:nvSpPr>
@@ -27301,7 +27525,7 @@
                 <a:ea typeface="Trebuchet MS" pitchFamily="34" charset="-122"/>
                 <a:cs typeface="Trebuchet MS" pitchFamily="34" charset="-120"/>
               </a:rPr>
-              <a:t>trustworthy</a:t>
+              <a:t>trustingly</a:t>
             </a:r>
             <a:endParaRPr lang="en-US" sz="2800" dirty="0"/>
           </a:p>
@@ -27381,7 +27605,7 @@
         </p:nvSpPr>
         <p:spPr>
           <a:xfrm>
-            <a:off x="2938272" y="2258568"/>
+            <a:off x="2221992" y="2258568"/>
             <a:ext cx="1828800" cy="292608"/>
           </a:xfrm>
           <a:prstGeom prst="rect">
@@ -27415,7 +27639,7 @@
         </p:nvSpPr>
         <p:spPr>
           <a:xfrm>
-            <a:off x="2938272" y="2258568"/>
+            <a:off x="2221992" y="2258568"/>
             <a:ext cx="1828800" cy="292608"/>
           </a:xfrm>
           <a:prstGeom prst="rect">
@@ -27454,7 +27678,7 @@
         </p:nvSpPr>
         <p:spPr>
           <a:xfrm>
-            <a:off x="2938272" y="2569464"/>
+            <a:off x="2221992" y="2569464"/>
             <a:ext cx="1828800" cy="201168"/>
           </a:xfrm>
           <a:prstGeom prst="rect">
@@ -27493,7 +27717,7 @@
         </p:nvSpPr>
         <p:spPr>
           <a:xfrm>
-            <a:off x="5803392" y="2258568"/>
+            <a:off x="4370832" y="2258568"/>
             <a:ext cx="1828800" cy="292608"/>
           </a:xfrm>
           <a:prstGeom prst="rect">
@@ -27527,7 +27751,7 @@
         </p:nvSpPr>
         <p:spPr>
           <a:xfrm>
-            <a:off x="5803392" y="2258568"/>
+            <a:off x="4370832" y="2258568"/>
             <a:ext cx="1828800" cy="292608"/>
           </a:xfrm>
           <a:prstGeom prst="rect">
@@ -27552,7 +27776,7 @@
                 <a:ea typeface="Trebuchet MS" pitchFamily="34" charset="-122"/>
                 <a:cs typeface="Trebuchet MS" pitchFamily="34" charset="-120"/>
               </a:rPr>
-              <a:t>worthy</a:t>
+              <a:t>ing</a:t>
             </a:r>
             <a:endParaRPr lang="en-US" sz="1300" dirty="0"/>
           </a:p>
@@ -27566,7 +27790,7 @@
         </p:nvSpPr>
         <p:spPr>
           <a:xfrm>
-            <a:off x="5803392" y="2569464"/>
+            <a:off x="4370832" y="2569464"/>
             <a:ext cx="1828800" cy="201168"/>
           </a:xfrm>
           <a:prstGeom prst="rect">
@@ -27591,7 +27815,7 @@
                 <a:ea typeface="Calibri" pitchFamily="34" charset="-122"/>
                 <a:cs typeface="Calibri" pitchFamily="34" charset="-120"/>
               </a:rPr>
-              <a:t>deserving of</a:t>
+              <a:t>in the manner of</a:t>
             </a:r>
             <a:endParaRPr lang="en-US" sz="850" dirty="0"/>
           </a:p>
@@ -27600,6 +27824,118 @@
       <p:sp>
         <p:nvSpPr>
           <p:cNvPr id="22" name="Shape 20"/>
+          <p:cNvSpPr/>
+          <p:nvPr/>
+        </p:nvSpPr>
+        <p:spPr>
+          <a:xfrm>
+            <a:off x="6519672" y="2258568"/>
+            <a:ext cx="1828800" cy="292608"/>
+          </a:xfrm>
+          <a:prstGeom prst="rect">
+            <a:avLst>
+              <a:gd name="adj" fmla="val 25000"/>
+            </a:avLst>
+          </a:prstGeom>
+          <a:solidFill>
+            <a:srgbClr val="FCE7F3"/>
+          </a:solidFill>
+          <a:ln w="19050">
+            <a:solidFill>
+              <a:srgbClr val="DB2777"/>
+            </a:solidFill>
+            <a:prstDash val="solid"/>
+          </a:ln>
+          <a:effectLst>
+            <a:outerShdw sx="100000" sy="100000" kx="0" ky="0" algn="bl" rotWithShape="0" blurRad="101600" dist="38100" dir="8100000">
+              <a:srgbClr val="000000">
+                <a:alpha val="12000"/>
+              </a:srgbClr>
+            </a:outerShdw>
+          </a:effectLst>
+        </p:spPr>
+      </p:sp>
+      <p:sp>
+        <p:nvSpPr>
+          <p:cNvPr id="23" name="Text 21"/>
+          <p:cNvSpPr/>
+          <p:nvPr/>
+        </p:nvSpPr>
+        <p:spPr>
+          <a:xfrm>
+            <a:off x="6519672" y="2258568"/>
+            <a:ext cx="1828800" cy="292608"/>
+          </a:xfrm>
+          <a:prstGeom prst="rect">
+            <a:avLst/>
+          </a:prstGeom>
+          <a:noFill/>
+          <a:ln/>
+        </p:spPr>
+        <p:txBody>
+          <a:bodyPr wrap="square" lIns="0" tIns="0" rIns="0" bIns="0" rtlCol="0" anchor="ctr"/>
+          <a:lstStyle/>
+          <a:p>
+            <a:pPr algn="ctr" indent="0" marL="0">
+              <a:buNone/>
+            </a:pPr>
+            <a:r>
+              <a:rPr lang="en-US" sz="1300" b="1" dirty="0">
+                <a:solidFill>
+                  <a:srgbClr val="9D174D"/>
+                </a:solidFill>
+                <a:latin typeface="Trebuchet MS" pitchFamily="34" charset="0"/>
+                <a:ea typeface="Trebuchet MS" pitchFamily="34" charset="-122"/>
+                <a:cs typeface="Trebuchet MS" pitchFamily="34" charset="-120"/>
+              </a:rPr>
+              <a:t>ly</a:t>
+            </a:r>
+            <a:endParaRPr lang="en-US" sz="1300" dirty="0"/>
+          </a:p>
+        </p:txBody>
+      </p:sp>
+      <p:sp>
+        <p:nvSpPr>
+          <p:cNvPr id="24" name="Text 22"/>
+          <p:cNvSpPr/>
+          <p:nvPr/>
+        </p:nvSpPr>
+        <p:spPr>
+          <a:xfrm>
+            <a:off x="6519672" y="2569464"/>
+            <a:ext cx="1828800" cy="201168"/>
+          </a:xfrm>
+          <a:prstGeom prst="rect">
+            <a:avLst/>
+          </a:prstGeom>
+          <a:noFill/>
+          <a:ln/>
+        </p:spPr>
+        <p:txBody>
+          <a:bodyPr wrap="square" lIns="0" tIns="0" rIns="0" bIns="0" rtlCol="0" anchor="t"/>
+          <a:lstStyle/>
+          <a:p>
+            <a:pPr algn="ctr" indent="0" marL="0">
+              <a:buNone/>
+            </a:pPr>
+            <a:r>
+              <a:rPr lang="en-US" sz="850" dirty="0">
+                <a:solidFill>
+                  <a:srgbClr val="475569"/>
+                </a:solidFill>
+                <a:latin typeface="Calibri" pitchFamily="34" charset="0"/>
+                <a:ea typeface="Calibri" pitchFamily="34" charset="-122"/>
+                <a:cs typeface="Calibri" pitchFamily="34" charset="-120"/>
+              </a:rPr>
+              <a:t>in a certain way</a:t>
+            </a:r>
+            <a:endParaRPr lang="en-US" sz="850" dirty="0"/>
+          </a:p>
+        </p:txBody>
+      </p:sp>
+      <p:sp>
+        <p:nvSpPr>
+          <p:cNvPr id="25" name="Shape 23"/>
           <p:cNvSpPr/>
           <p:nvPr/>
         </p:nvSpPr>
@@ -27626,7 +27962,7 @@
       </p:sp>
       <p:sp>
         <p:nvSpPr>
-          <p:cNvPr id="23" name="Text 21"/>
+          <p:cNvPr id="26" name="Text 24"/>
           <p:cNvSpPr/>
           <p:nvPr/>
         </p:nvSpPr>
@@ -27665,7 +28001,7 @@
       </p:sp>
       <p:sp>
         <p:nvSpPr>
-          <p:cNvPr id="24" name="Shape 22"/>
+          <p:cNvPr id="27" name="Shape 25"/>
           <p:cNvSpPr/>
           <p:nvPr/>
         </p:nvSpPr>
@@ -27692,7 +28028,7 @@
       </p:sp>
       <p:sp>
         <p:nvSpPr>
-          <p:cNvPr id="25" name="Shape 23"/>
+          <p:cNvPr id="28" name="Shape 26"/>
           <p:cNvSpPr/>
           <p:nvPr/>
         </p:nvSpPr>
@@ -27719,7 +28055,7 @@
       </p:sp>
       <p:sp>
         <p:nvSpPr>
-          <p:cNvPr id="26" name="Text 24"/>
+          <p:cNvPr id="29" name="Text 27"/>
           <p:cNvSpPr/>
           <p:nvPr/>
         </p:nvSpPr>
@@ -27758,7 +28094,7 @@
       </p:sp>
       <p:sp>
         <p:nvSpPr>
-          <p:cNvPr id="27" name="Text 25"/>
+          <p:cNvPr id="30" name="Text 28"/>
           <p:cNvSpPr/>
           <p:nvPr/>
         </p:nvSpPr>
@@ -27797,7 +28133,7 @@
       </p:sp>
       <p:sp>
         <p:nvSpPr>
-          <p:cNvPr id="28" name="Shape 26"/>
+          <p:cNvPr id="31" name="Shape 29"/>
           <p:cNvSpPr/>
           <p:nvPr/>
         </p:nvSpPr>
@@ -27824,7 +28160,7 @@
       </p:sp>
       <p:sp>
         <p:nvSpPr>
-          <p:cNvPr id="29" name="Text 27"/>
+          <p:cNvPr id="32" name="Text 30"/>
           <p:cNvSpPr/>
           <p:nvPr/>
         </p:nvSpPr>
@@ -27855,7 +28191,7 @@
                 <a:ea typeface="Trebuchet MS" pitchFamily="34" charset="-122"/>
                 <a:cs typeface="Trebuchet MS" pitchFamily="34" charset="-120"/>
               </a:rPr>
-              <a:t>wor</a:t>
+              <a:t>ing</a:t>
             </a:r>
             <a:endParaRPr lang="en-US" sz="1400" dirty="0"/>
           </a:p>
@@ -27863,7 +28199,7 @@
       </p:sp>
       <p:sp>
         <p:nvSpPr>
-          <p:cNvPr id="30" name="Text 28"/>
+          <p:cNvPr id="33" name="Text 31"/>
           <p:cNvSpPr/>
           <p:nvPr/>
         </p:nvSpPr>
@@ -27902,7 +28238,7 @@
       </p:sp>
       <p:sp>
         <p:nvSpPr>
-          <p:cNvPr id="31" name="Shape 29"/>
+          <p:cNvPr id="34" name="Shape 32"/>
           <p:cNvSpPr/>
           <p:nvPr/>
         </p:nvSpPr>
@@ -27929,7 +28265,7 @@
       </p:sp>
       <p:sp>
         <p:nvSpPr>
-          <p:cNvPr id="32" name="Text 30"/>
+          <p:cNvPr id="35" name="Text 33"/>
           <p:cNvSpPr/>
           <p:nvPr/>
         </p:nvSpPr>
@@ -27960,7 +28296,7 @@
                 <a:ea typeface="Trebuchet MS" pitchFamily="34" charset="-122"/>
                 <a:cs typeface="Trebuchet MS" pitchFamily="34" charset="-120"/>
               </a:rPr>
-              <a:t>thy</a:t>
+              <a:t>ly</a:t>
             </a:r>
             <a:endParaRPr lang="en-US" sz="1400" dirty="0"/>
           </a:p>
@@ -27968,7 +28304,7 @@
       </p:sp>
       <p:sp>
         <p:nvSpPr>
-          <p:cNvPr id="33" name="Shape 31"/>
+          <p:cNvPr id="36" name="Shape 34"/>
           <p:cNvSpPr/>
           <p:nvPr/>
         </p:nvSpPr>
@@ -27995,7 +28331,7 @@
       </p:sp>
       <p:sp>
         <p:nvSpPr>
-          <p:cNvPr id="34" name="Text 32"/>
+          <p:cNvPr id="37" name="Text 35"/>
           <p:cNvSpPr/>
           <p:nvPr/>
         </p:nvSpPr>
@@ -28034,7 +28370,7 @@
       </p:sp>
       <p:sp>
         <p:nvSpPr>
-          <p:cNvPr id="35" name="Shape 33"/>
+          <p:cNvPr id="38" name="Shape 36"/>
           <p:cNvSpPr/>
           <p:nvPr/>
         </p:nvSpPr>
@@ -28061,7 +28397,7 @@
       </p:sp>
       <p:sp>
         <p:nvSpPr>
-          <p:cNvPr id="36" name="Shape 34"/>
+          <p:cNvPr id="39" name="Shape 37"/>
           <p:cNvSpPr/>
           <p:nvPr/>
         </p:nvSpPr>
@@ -28088,7 +28424,7 @@
       </p:sp>
       <p:sp>
         <p:nvSpPr>
-          <p:cNvPr id="37" name="Text 35"/>
+          <p:cNvPr id="40" name="Text 38"/>
           <p:cNvSpPr/>
           <p:nvPr/>
         </p:nvSpPr>
@@ -28127,7 +28463,7 @@
       </p:sp>
       <p:sp>
         <p:nvSpPr>
-          <p:cNvPr id="38" name="Shape 36"/>
+          <p:cNvPr id="41" name="Shape 39"/>
           <p:cNvSpPr/>
           <p:nvPr/>
         </p:nvSpPr>
@@ -28154,7 +28490,7 @@
       </p:sp>
       <p:sp>
         <p:nvSpPr>
-          <p:cNvPr id="39" name="Text 37"/>
+          <p:cNvPr id="42" name="Text 40"/>
           <p:cNvSpPr/>
           <p:nvPr/>
         </p:nvSpPr>
@@ -28193,7 +28529,7 @@
       </p:sp>
       <p:sp>
         <p:nvSpPr>
-          <p:cNvPr id="40" name="Shape 38"/>
+          <p:cNvPr id="43" name="Shape 41"/>
           <p:cNvSpPr/>
           <p:nvPr/>
         </p:nvSpPr>
@@ -28220,7 +28556,7 @@
       </p:sp>
       <p:sp>
         <p:nvSpPr>
-          <p:cNvPr id="41" name="Text 39"/>
+          <p:cNvPr id="44" name="Text 42"/>
           <p:cNvSpPr/>
           <p:nvPr/>
         </p:nvSpPr>
@@ -28259,7 +28595,7 @@
       </p:sp>
       <p:sp>
         <p:nvSpPr>
-          <p:cNvPr id="42" name="Shape 40"/>
+          <p:cNvPr id="45" name="Shape 43"/>
           <p:cNvSpPr/>
           <p:nvPr/>
         </p:nvSpPr>
@@ -28286,7 +28622,7 @@
       </p:sp>
       <p:sp>
         <p:nvSpPr>
-          <p:cNvPr id="43" name="Text 41"/>
+          <p:cNvPr id="46" name="Text 44"/>
           <p:cNvSpPr/>
           <p:nvPr/>
         </p:nvSpPr>
@@ -28325,7 +28661,7 @@
       </p:sp>
       <p:sp>
         <p:nvSpPr>
-          <p:cNvPr id="44" name="Shape 42"/>
+          <p:cNvPr id="47" name="Shape 45"/>
           <p:cNvSpPr/>
           <p:nvPr/>
         </p:nvSpPr>
@@ -28352,7 +28688,7 @@
       </p:sp>
       <p:sp>
         <p:nvSpPr>
-          <p:cNvPr id="45" name="Text 43"/>
+          <p:cNvPr id="48" name="Text 46"/>
           <p:cNvSpPr/>
           <p:nvPr/>
         </p:nvSpPr>
@@ -28391,7 +28727,7 @@
       </p:sp>
       <p:sp>
         <p:nvSpPr>
-          <p:cNvPr id="46" name="Shape 44"/>
+          <p:cNvPr id="49" name="Shape 47"/>
           <p:cNvSpPr/>
           <p:nvPr/>
         </p:nvSpPr>
@@ -28418,7 +28754,7 @@
       </p:sp>
       <p:sp>
         <p:nvSpPr>
-          <p:cNvPr id="47" name="Text 45"/>
+          <p:cNvPr id="50" name="Text 48"/>
           <p:cNvSpPr/>
           <p:nvPr/>
         </p:nvSpPr>
@@ -28449,7 +28785,7 @@
                 <a:ea typeface="Trebuchet MS" pitchFamily="34" charset="-122"/>
                 <a:cs typeface="Trebuchet MS" pitchFamily="34" charset="-120"/>
               </a:rPr>
-              <a:t>w</a:t>
+              <a:t>i</a:t>
             </a:r>
             <a:endParaRPr lang="en-US" sz="900" dirty="0"/>
           </a:p>
@@ -28457,7 +28793,7 @@
       </p:sp>
       <p:sp>
         <p:nvSpPr>
-          <p:cNvPr id="48" name="Shape 46"/>
+          <p:cNvPr id="51" name="Shape 49"/>
           <p:cNvSpPr/>
           <p:nvPr/>
         </p:nvSpPr>
@@ -28484,7 +28820,7 @@
       </p:sp>
       <p:sp>
         <p:nvSpPr>
-          <p:cNvPr id="49" name="Text 47"/>
+          <p:cNvPr id="52" name="Text 50"/>
           <p:cNvSpPr/>
           <p:nvPr/>
         </p:nvSpPr>
@@ -28515,7 +28851,7 @@
                 <a:ea typeface="Trebuchet MS" pitchFamily="34" charset="-122"/>
                 <a:cs typeface="Trebuchet MS" pitchFamily="34" charset="-120"/>
               </a:rPr>
-              <a:t>or</a:t>
+              <a:t>ng</a:t>
             </a:r>
             <a:endParaRPr lang="en-US" sz="900" dirty="0"/>
           </a:p>
@@ -28523,7 +28859,7 @@
       </p:sp>
       <p:sp>
         <p:nvSpPr>
-          <p:cNvPr id="50" name="Shape 48"/>
+          <p:cNvPr id="53" name="Shape 51"/>
           <p:cNvSpPr/>
           <p:nvPr/>
         </p:nvSpPr>
@@ -28550,7 +28886,7 @@
       </p:sp>
       <p:sp>
         <p:nvSpPr>
-          <p:cNvPr id="51" name="Text 49"/>
+          <p:cNvPr id="54" name="Text 52"/>
           <p:cNvSpPr/>
           <p:nvPr/>
         </p:nvSpPr>
@@ -28581,7 +28917,7 @@
                 <a:ea typeface="Trebuchet MS" pitchFamily="34" charset="-122"/>
                 <a:cs typeface="Trebuchet MS" pitchFamily="34" charset="-120"/>
               </a:rPr>
-              <a:t>th</a:t>
+              <a:t>l</a:t>
             </a:r>
             <a:endParaRPr lang="en-US" sz="900" dirty="0"/>
           </a:p>
@@ -28589,7 +28925,7 @@
       </p:sp>
       <p:sp>
         <p:nvSpPr>
-          <p:cNvPr id="52" name="Shape 50"/>
+          <p:cNvPr id="55" name="Shape 53"/>
           <p:cNvSpPr/>
           <p:nvPr/>
         </p:nvSpPr>
@@ -28616,7 +28952,7 @@
       </p:sp>
       <p:sp>
         <p:nvSpPr>
-          <p:cNvPr id="53" name="Text 51"/>
+          <p:cNvPr id="56" name="Text 54"/>
           <p:cNvSpPr/>
           <p:nvPr/>
         </p:nvSpPr>
@@ -29078,7 +29414,7 @@
                 <a:ea typeface="Trebuchet MS" pitchFamily="34" charset="-122"/>
                 <a:cs typeface="Trebuchet MS" pitchFamily="34" charset="-120"/>
               </a:rPr>
-              <a:t>trusting</a:t>
+              <a:t>distrust</a:t>
             </a:r>
             <a:endParaRPr lang="en-US" sz="2800" dirty="0"/>
           </a:p>
@@ -29905,7 +30241,7 @@
                 <a:ea typeface="Trebuchet MS" pitchFamily="34" charset="-122"/>
                 <a:cs typeface="Trebuchet MS" pitchFamily="34" charset="-120"/>
               </a:rPr>
-              <a:t>trusting</a:t>
+              <a:t>distrust</a:t>
             </a:r>
             <a:endParaRPr lang="en-US" sz="2800" dirty="0"/>
           </a:p>
@@ -29994,11 +30330,11 @@
             </a:avLst>
           </a:prstGeom>
           <a:solidFill>
-            <a:srgbClr val="CCFBF1"/>
+            <a:srgbClr val="DDD6FE"/>
           </a:solidFill>
           <a:ln w="19050">
             <a:solidFill>
-              <a:srgbClr val="0D9488"/>
+              <a:srgbClr val="7C3AED"/>
             </a:solidFill>
             <a:prstDash val="solid"/>
           </a:ln>
@@ -30038,13 +30374,13 @@
             <a:r>
               <a:rPr lang="en-US" sz="1300" b="1" dirty="0">
                 <a:solidFill>
-                  <a:srgbClr val="0F766E"/>
+                  <a:srgbClr val="4C1D95"/>
                 </a:solidFill>
                 <a:latin typeface="Trebuchet MS" pitchFamily="34" charset="0"/>
                 <a:ea typeface="Trebuchet MS" pitchFamily="34" charset="-122"/>
                 <a:cs typeface="Trebuchet MS" pitchFamily="34" charset="-120"/>
               </a:rPr>
-              <a:t>trust</a:t>
+              <a:t>dis</a:t>
             </a:r>
             <a:endParaRPr lang="en-US" sz="1300" dirty="0"/>
           </a:p>
@@ -30083,7 +30419,7 @@
                 <a:ea typeface="Calibri" pitchFamily="34" charset="-122"/>
                 <a:cs typeface="Calibri" pitchFamily="34" charset="-120"/>
               </a:rPr>
-              <a:t>believe, rely on</a:t>
+              <a:t>not, opposite of</a:t>
             </a:r>
             <a:endParaRPr lang="en-US" sz="850" dirty="0"/>
           </a:p>
@@ -30106,11 +30442,11 @@
             </a:avLst>
           </a:prstGeom>
           <a:solidFill>
-            <a:srgbClr val="FCE7F3"/>
+            <a:srgbClr val="CCFBF1"/>
           </a:solidFill>
           <a:ln w="19050">
             <a:solidFill>
-              <a:srgbClr val="DB2777"/>
+              <a:srgbClr val="0D9488"/>
             </a:solidFill>
             <a:prstDash val="solid"/>
           </a:ln>
@@ -30150,13 +30486,13 @@
             <a:r>
               <a:rPr lang="en-US" sz="1300" b="1" dirty="0">
                 <a:solidFill>
-                  <a:srgbClr val="9D174D"/>
+                  <a:srgbClr val="0F766E"/>
                 </a:solidFill>
                 <a:latin typeface="Trebuchet MS" pitchFamily="34" charset="0"/>
                 <a:ea typeface="Trebuchet MS" pitchFamily="34" charset="-122"/>
                 <a:cs typeface="Trebuchet MS" pitchFamily="34" charset="-120"/>
               </a:rPr>
-              <a:t>ing</a:t>
+              <a:t>trust</a:t>
             </a:r>
             <a:endParaRPr lang="en-US" sz="1300" dirty="0"/>
           </a:p>
@@ -30195,7 +30531,7 @@
                 <a:ea typeface="Calibri" pitchFamily="34" charset="-122"/>
                 <a:cs typeface="Calibri" pitchFamily="34" charset="-120"/>
               </a:rPr>
-              <a:t>doing, ongoing action</a:t>
+              <a:t>believe, rely on</a:t>
             </a:r>
             <a:endParaRPr lang="en-US" sz="850" dirty="0"/>
           </a:p>
@@ -30890,7 +31226,7 @@
                 <a:ea typeface="Trebuchet MS" pitchFamily="34" charset="-122"/>
                 <a:cs typeface="Trebuchet MS" pitchFamily="34" charset="-120"/>
               </a:rPr>
-              <a:t>trusting</a:t>
+              <a:t>distrust</a:t>
             </a:r>
             <a:endParaRPr lang="en-US" sz="2800" dirty="0"/>
           </a:p>
@@ -30979,11 +31315,11 @@
             </a:avLst>
           </a:prstGeom>
           <a:solidFill>
-            <a:srgbClr val="CCFBF1"/>
+            <a:srgbClr val="DDD6FE"/>
           </a:solidFill>
           <a:ln w="19050">
             <a:solidFill>
-              <a:srgbClr val="0D9488"/>
+              <a:srgbClr val="7C3AED"/>
             </a:solidFill>
             <a:prstDash val="solid"/>
           </a:ln>
@@ -31023,13 +31359,13 @@
             <a:r>
               <a:rPr lang="en-US" sz="1300" b="1" dirty="0">
                 <a:solidFill>
-                  <a:srgbClr val="0F766E"/>
+                  <a:srgbClr val="4C1D95"/>
                 </a:solidFill>
                 <a:latin typeface="Trebuchet MS" pitchFamily="34" charset="0"/>
                 <a:ea typeface="Trebuchet MS" pitchFamily="34" charset="-122"/>
                 <a:cs typeface="Trebuchet MS" pitchFamily="34" charset="-120"/>
               </a:rPr>
-              <a:t>trust</a:t>
+              <a:t>dis</a:t>
             </a:r>
             <a:endParaRPr lang="en-US" sz="1300" dirty="0"/>
           </a:p>
@@ -31068,7 +31404,7 @@
                 <a:ea typeface="Calibri" pitchFamily="34" charset="-122"/>
                 <a:cs typeface="Calibri" pitchFamily="34" charset="-120"/>
               </a:rPr>
-              <a:t>believe, rely on</a:t>
+              <a:t>not, opposite of</a:t>
             </a:r>
             <a:endParaRPr lang="en-US" sz="850" dirty="0"/>
           </a:p>
@@ -31091,11 +31427,11 @@
             </a:avLst>
           </a:prstGeom>
           <a:solidFill>
-            <a:srgbClr val="FCE7F3"/>
+            <a:srgbClr val="CCFBF1"/>
           </a:solidFill>
           <a:ln w="19050">
             <a:solidFill>
-              <a:srgbClr val="DB2777"/>
+              <a:srgbClr val="0D9488"/>
             </a:solidFill>
             <a:prstDash val="solid"/>
           </a:ln>
@@ -31135,13 +31471,13 @@
             <a:r>
               <a:rPr lang="en-US" sz="1300" b="1" dirty="0">
                 <a:solidFill>
-                  <a:srgbClr val="9D174D"/>
+                  <a:srgbClr val="0F766E"/>
                 </a:solidFill>
                 <a:latin typeface="Trebuchet MS" pitchFamily="34" charset="0"/>
                 <a:ea typeface="Trebuchet MS" pitchFamily="34" charset="-122"/>
                 <a:cs typeface="Trebuchet MS" pitchFamily="34" charset="-120"/>
               </a:rPr>
-              <a:t>ing</a:t>
+              <a:t>trust</a:t>
             </a:r>
             <a:endParaRPr lang="en-US" sz="1300" dirty="0"/>
           </a:p>
@@ -31180,7 +31516,7 @@
                 <a:ea typeface="Calibri" pitchFamily="34" charset="-122"/>
                 <a:cs typeface="Calibri" pitchFamily="34" charset="-120"/>
               </a:rPr>
-              <a:t>doing, ongoing action</a:t>
+              <a:t>believe, rely on</a:t>
             </a:r>
             <a:endParaRPr lang="en-US" sz="850" dirty="0"/>
           </a:p>
@@ -31339,7 +31675,7 @@
                 <a:ea typeface="Trebuchet MS" pitchFamily="34" charset="-122"/>
                 <a:cs typeface="Trebuchet MS" pitchFamily="34" charset="-120"/>
               </a:rPr>
-              <a:t>trust</a:t>
+              <a:t>dis</a:t>
             </a:r>
             <a:endParaRPr lang="en-US" sz="1400" dirty="0"/>
           </a:p>
@@ -31444,7 +31780,7 @@
                 <a:ea typeface="Trebuchet MS" pitchFamily="34" charset="-122"/>
                 <a:cs typeface="Trebuchet MS" pitchFamily="34" charset="-120"/>
               </a:rPr>
-              <a:t>ing</a:t>
+              <a:t>trust</a:t>
             </a:r>
             <a:endParaRPr lang="en-US" sz="1400" dirty="0"/>
           </a:p>
@@ -32007,7 +32343,7 @@
                 <a:ea typeface="Trebuchet MS" pitchFamily="34" charset="-122"/>
                 <a:cs typeface="Trebuchet MS" pitchFamily="34" charset="-120"/>
               </a:rPr>
-              <a:t>trusting</a:t>
+              <a:t>distrust</a:t>
             </a:r>
             <a:endParaRPr lang="en-US" sz="2800" dirty="0"/>
           </a:p>
@@ -32096,11 +32432,11 @@
             </a:avLst>
           </a:prstGeom>
           <a:solidFill>
-            <a:srgbClr val="CCFBF1"/>
+            <a:srgbClr val="DDD6FE"/>
           </a:solidFill>
           <a:ln w="19050">
             <a:solidFill>
-              <a:srgbClr val="0D9488"/>
+              <a:srgbClr val="7C3AED"/>
             </a:solidFill>
             <a:prstDash val="solid"/>
           </a:ln>
@@ -32140,13 +32476,13 @@
             <a:r>
               <a:rPr lang="en-US" sz="1300" b="1" dirty="0">
                 <a:solidFill>
-                  <a:srgbClr val="0F766E"/>
+                  <a:srgbClr val="4C1D95"/>
                 </a:solidFill>
                 <a:latin typeface="Trebuchet MS" pitchFamily="34" charset="0"/>
                 <a:ea typeface="Trebuchet MS" pitchFamily="34" charset="-122"/>
                 <a:cs typeface="Trebuchet MS" pitchFamily="34" charset="-120"/>
               </a:rPr>
-              <a:t>trust</a:t>
+              <a:t>dis</a:t>
             </a:r>
             <a:endParaRPr lang="en-US" sz="1300" dirty="0"/>
           </a:p>
@@ -32185,7 +32521,7 @@
                 <a:ea typeface="Calibri" pitchFamily="34" charset="-122"/>
                 <a:cs typeface="Calibri" pitchFamily="34" charset="-120"/>
               </a:rPr>
-              <a:t>believe, rely on</a:t>
+              <a:t>not, opposite of</a:t>
             </a:r>
             <a:endParaRPr lang="en-US" sz="850" dirty="0"/>
           </a:p>
@@ -32208,11 +32544,11 @@
             </a:avLst>
           </a:prstGeom>
           <a:solidFill>
-            <a:srgbClr val="FCE7F3"/>
+            <a:srgbClr val="CCFBF1"/>
           </a:solidFill>
           <a:ln w="19050">
             <a:solidFill>
-              <a:srgbClr val="DB2777"/>
+              <a:srgbClr val="0D9488"/>
             </a:solidFill>
             <a:prstDash val="solid"/>
           </a:ln>
@@ -32252,13 +32588,13 @@
             <a:r>
               <a:rPr lang="en-US" sz="1300" b="1" dirty="0">
                 <a:solidFill>
-                  <a:srgbClr val="9D174D"/>
+                  <a:srgbClr val="0F766E"/>
                 </a:solidFill>
                 <a:latin typeface="Trebuchet MS" pitchFamily="34" charset="0"/>
                 <a:ea typeface="Trebuchet MS" pitchFamily="34" charset="-122"/>
                 <a:cs typeface="Trebuchet MS" pitchFamily="34" charset="-120"/>
               </a:rPr>
-              <a:t>ing</a:t>
+              <a:t>trust</a:t>
             </a:r>
             <a:endParaRPr lang="en-US" sz="1300" dirty="0"/>
           </a:p>
@@ -32297,7 +32633,7 @@
                 <a:ea typeface="Calibri" pitchFamily="34" charset="-122"/>
                 <a:cs typeface="Calibri" pitchFamily="34" charset="-120"/>
               </a:rPr>
-              <a:t>doing, ongoing action</a:t>
+              <a:t>believe, rely on</a:t>
             </a:r>
             <a:endParaRPr lang="en-US" sz="850" dirty="0"/>
           </a:p>
@@ -32456,7 +32792,7 @@
                 <a:ea typeface="Trebuchet MS" pitchFamily="34" charset="-122"/>
                 <a:cs typeface="Trebuchet MS" pitchFamily="34" charset="-120"/>
               </a:rPr>
-              <a:t>trust</a:t>
+              <a:t>dis</a:t>
             </a:r>
             <a:endParaRPr lang="en-US" sz="1400" dirty="0"/>
           </a:p>
@@ -32561,7 +32897,7 @@
                 <a:ea typeface="Trebuchet MS" pitchFamily="34" charset="-122"/>
                 <a:cs typeface="Trebuchet MS" pitchFamily="34" charset="-120"/>
               </a:rPr>
-              <a:t>ing</a:t>
+              <a:t>trust</a:t>
             </a:r>
             <a:endParaRPr lang="en-US" sz="1400" dirty="0"/>
           </a:p>
@@ -32668,7 +33004,7 @@
         </p:nvSpPr>
         <p:spPr>
           <a:xfrm>
-            <a:off x="2124837" y="4169664"/>
+            <a:off x="2023872" y="4169664"/>
             <a:ext cx="685800" cy="475488"/>
           </a:xfrm>
           <a:prstGeom prst="rect">
@@ -32695,7 +33031,7 @@
         </p:nvSpPr>
         <p:spPr>
           <a:xfrm>
-            <a:off x="2124837" y="4169664"/>
+            <a:off x="2023872" y="4169664"/>
             <a:ext cx="685800" cy="475488"/>
           </a:xfrm>
           <a:prstGeom prst="rect">
@@ -32720,7 +33056,7 @@
                 <a:ea typeface="Trebuchet MS" pitchFamily="34" charset="-122"/>
                 <a:cs typeface="Trebuchet MS" pitchFamily="34" charset="-120"/>
               </a:rPr>
-              <a:t>t</a:t>
+              <a:t>d</a:t>
             </a:r>
             <a:endParaRPr lang="en-US" sz="900" dirty="0"/>
           </a:p>
@@ -32734,7 +33070,7 @@
         </p:nvSpPr>
         <p:spPr>
           <a:xfrm>
-            <a:off x="3033522" y="4169664"/>
+            <a:off x="2831592" y="4169664"/>
             <a:ext cx="685800" cy="475488"/>
           </a:xfrm>
           <a:prstGeom prst="rect">
@@ -32761,7 +33097,7 @@
         </p:nvSpPr>
         <p:spPr>
           <a:xfrm>
-            <a:off x="3033522" y="4169664"/>
+            <a:off x="2831592" y="4169664"/>
             <a:ext cx="685800" cy="475488"/>
           </a:xfrm>
           <a:prstGeom prst="rect">
@@ -32786,7 +33122,7 @@
                 <a:ea typeface="Trebuchet MS" pitchFamily="34" charset="-122"/>
                 <a:cs typeface="Trebuchet MS" pitchFamily="34" charset="-120"/>
               </a:rPr>
-              <a:t>r</a:t>
+              <a:t>i</a:t>
             </a:r>
             <a:endParaRPr lang="en-US" sz="900" dirty="0"/>
           </a:p>
@@ -32800,7 +33136,7 @@
         </p:nvSpPr>
         <p:spPr>
           <a:xfrm>
-            <a:off x="3942207" y="4169664"/>
+            <a:off x="3639312" y="4169664"/>
             <a:ext cx="685800" cy="475488"/>
           </a:xfrm>
           <a:prstGeom prst="rect">
@@ -32827,7 +33163,7 @@
         </p:nvSpPr>
         <p:spPr>
           <a:xfrm>
-            <a:off x="3942207" y="4169664"/>
+            <a:off x="3639312" y="4169664"/>
             <a:ext cx="685800" cy="475488"/>
           </a:xfrm>
           <a:prstGeom prst="rect">
@@ -32852,7 +33188,7 @@
                 <a:ea typeface="Trebuchet MS" pitchFamily="34" charset="-122"/>
                 <a:cs typeface="Trebuchet MS" pitchFamily="34" charset="-120"/>
               </a:rPr>
-              <a:t>u</a:t>
+              <a:t>s</a:t>
             </a:r>
             <a:endParaRPr lang="en-US" sz="900" dirty="0"/>
           </a:p>
@@ -32866,7 +33202,7 @@
         </p:nvSpPr>
         <p:spPr>
           <a:xfrm>
-            <a:off x="4850892" y="4169664"/>
+            <a:off x="4447032" y="4169664"/>
             <a:ext cx="685800" cy="475488"/>
           </a:xfrm>
           <a:prstGeom prst="rect">
@@ -32893,7 +33229,7 @@
         </p:nvSpPr>
         <p:spPr>
           <a:xfrm>
-            <a:off x="4850892" y="4169664"/>
+            <a:off x="4447032" y="4169664"/>
             <a:ext cx="685800" cy="475488"/>
           </a:xfrm>
           <a:prstGeom prst="rect">
@@ -32918,7 +33254,7 @@
                 <a:ea typeface="Trebuchet MS" pitchFamily="34" charset="-122"/>
                 <a:cs typeface="Trebuchet MS" pitchFamily="34" charset="-120"/>
               </a:rPr>
-              <a:t>s</a:t>
+              <a:t>t</a:t>
             </a:r>
             <a:endParaRPr lang="en-US" sz="900" dirty="0"/>
           </a:p>
@@ -32932,7 +33268,7 @@
         </p:nvSpPr>
         <p:spPr>
           <a:xfrm>
-            <a:off x="5759577" y="4169664"/>
+            <a:off x="5254752" y="4169664"/>
             <a:ext cx="685800" cy="475488"/>
           </a:xfrm>
           <a:prstGeom prst="rect">
@@ -32959,7 +33295,7 @@
         </p:nvSpPr>
         <p:spPr>
           <a:xfrm>
-            <a:off x="5759577" y="4169664"/>
+            <a:off x="5254752" y="4169664"/>
             <a:ext cx="685800" cy="475488"/>
           </a:xfrm>
           <a:prstGeom prst="rect">
@@ -32984,7 +33320,7 @@
                 <a:ea typeface="Trebuchet MS" pitchFamily="34" charset="-122"/>
                 <a:cs typeface="Trebuchet MS" pitchFamily="34" charset="-120"/>
               </a:rPr>
-              <a:t>t</a:t>
+              <a:t>r</a:t>
             </a:r>
             <a:endParaRPr lang="en-US" sz="900" dirty="0"/>
           </a:p>
@@ -32998,7 +33334,7 @@
         </p:nvSpPr>
         <p:spPr>
           <a:xfrm>
-            <a:off x="6668262" y="4169664"/>
+            <a:off x="6062472" y="4169664"/>
             <a:ext cx="685800" cy="475488"/>
           </a:xfrm>
           <a:prstGeom prst="rect">
@@ -33025,7 +33361,7 @@
         </p:nvSpPr>
         <p:spPr>
           <a:xfrm>
-            <a:off x="6668262" y="4169664"/>
+            <a:off x="6062472" y="4169664"/>
             <a:ext cx="685800" cy="475488"/>
           </a:xfrm>
           <a:prstGeom prst="rect">
@@ -33050,7 +33386,7 @@
                 <a:ea typeface="Trebuchet MS" pitchFamily="34" charset="-122"/>
                 <a:cs typeface="Trebuchet MS" pitchFamily="34" charset="-120"/>
               </a:rPr>
-              <a:t>i</a:t>
+              <a:t>u</a:t>
             </a:r>
             <a:endParaRPr lang="en-US" sz="900" dirty="0"/>
           </a:p>
@@ -33064,7 +33400,7 @@
         </p:nvSpPr>
         <p:spPr>
           <a:xfrm>
-            <a:off x="7576947" y="4169664"/>
+            <a:off x="6870192" y="4169664"/>
             <a:ext cx="685800" cy="475488"/>
           </a:xfrm>
           <a:prstGeom prst="rect">
@@ -33091,7 +33427,7 @@
         </p:nvSpPr>
         <p:spPr>
           <a:xfrm>
-            <a:off x="7576947" y="4169664"/>
+            <a:off x="6870192" y="4169664"/>
             <a:ext cx="685800" cy="475488"/>
           </a:xfrm>
           <a:prstGeom prst="rect">
@@ -33116,7 +33452,73 @@
                 <a:ea typeface="Trebuchet MS" pitchFamily="34" charset="-122"/>
                 <a:cs typeface="Trebuchet MS" pitchFamily="34" charset="-120"/>
               </a:rPr>
-              <a:t>ng</a:t>
+              <a:t>s</a:t>
+            </a:r>
+            <a:endParaRPr lang="en-US" sz="900" dirty="0"/>
+          </a:p>
+        </p:txBody>
+      </p:sp>
+      <p:sp>
+        <p:nvSpPr>
+          <p:cNvPr id="47" name="Shape 45"/>
+          <p:cNvSpPr/>
+          <p:nvPr/>
+        </p:nvSpPr>
+        <p:spPr>
+          <a:xfrm>
+            <a:off x="7677912" y="4169664"/>
+            <a:ext cx="685800" cy="475488"/>
+          </a:xfrm>
+          <a:prstGeom prst="rect">
+            <a:avLst>
+              <a:gd name="adj" fmla="val 7692"/>
+            </a:avLst>
+          </a:prstGeom>
+          <a:solidFill>
+            <a:srgbClr val="FFFFFF"/>
+          </a:solidFill>
+          <a:ln w="12700">
+            <a:solidFill>
+              <a:srgbClr val="DB2777"/>
+            </a:solidFill>
+            <a:prstDash val="solid"/>
+          </a:ln>
+        </p:spPr>
+      </p:sp>
+      <p:sp>
+        <p:nvSpPr>
+          <p:cNvPr id="48" name="Text 46"/>
+          <p:cNvSpPr/>
+          <p:nvPr/>
+        </p:nvSpPr>
+        <p:spPr>
+          <a:xfrm>
+            <a:off x="7677912" y="4169664"/>
+            <a:ext cx="685800" cy="475488"/>
+          </a:xfrm>
+          <a:prstGeom prst="rect">
+            <a:avLst/>
+          </a:prstGeom>
+          <a:noFill/>
+          <a:ln/>
+        </p:spPr>
+        <p:txBody>
+          <a:bodyPr wrap="square" lIns="0" tIns="0" rIns="0" bIns="0" rtlCol="0" anchor="ctr"/>
+          <a:lstStyle/>
+          <a:p>
+            <a:pPr algn="ctr" indent="0" marL="0">
+              <a:buNone/>
+            </a:pPr>
+            <a:r>
+              <a:rPr lang="en-US" sz="900" b="1" dirty="0">
+                <a:solidFill>
+                  <a:srgbClr val="9D174D"/>
+                </a:solidFill>
+                <a:latin typeface="Trebuchet MS" pitchFamily="34" charset="0"/>
+                <a:ea typeface="Trebuchet MS" pitchFamily="34" charset="-122"/>
+                <a:cs typeface="Trebuchet MS" pitchFamily="34" charset="-120"/>
+              </a:rPr>
+              <a:t>t</a:t>
             </a:r>
             <a:endParaRPr lang="en-US" sz="900" dirty="0"/>
           </a:p>
@@ -35618,7 +36020,7 @@
                 <a:ea typeface="Trebuchet MS" pitchFamily="34" charset="-122"/>
                 <a:cs typeface="Trebuchet MS" pitchFamily="34" charset="-120"/>
               </a:rPr>
-              <a:t>-s</a:t>
+              <a:t>-ingly</a:t>
             </a:r>
             <a:endParaRPr lang="en-US" sz="1300" dirty="0"/>
           </a:p>
@@ -35723,7 +36125,7 @@
                 <a:ea typeface="Trebuchet MS" pitchFamily="34" charset="-122"/>
                 <a:cs typeface="Trebuchet MS" pitchFamily="34" charset="-120"/>
               </a:rPr>
-              <a:t>distrust</a:t>
+              <a:t>trustworthy</a:t>
             </a:r>
             <a:endParaRPr lang="en-US" sz="1200" dirty="0"/>
           </a:p>
@@ -35789,7 +36191,7 @@
                 <a:ea typeface="Trebuchet MS" pitchFamily="34" charset="-122"/>
                 <a:cs typeface="Trebuchet MS" pitchFamily="34" charset="-120"/>
               </a:rPr>
-              <a:t>mistrust</a:t>
+              <a:t>distrust</a:t>
             </a:r>
             <a:endParaRPr lang="en-US" sz="1200" dirty="0"/>
           </a:p>
@@ -35855,7 +36257,7 @@
                 <a:ea typeface="Trebuchet MS" pitchFamily="34" charset="-122"/>
                 <a:cs typeface="Trebuchet MS" pitchFamily="34" charset="-120"/>
               </a:rPr>
-              <a:t>trustworthy</a:t>
+              <a:t>mistrust</a:t>
             </a:r>
             <a:endParaRPr lang="en-US" sz="1200" dirty="0"/>
           </a:p>
@@ -35921,7 +36323,7 @@
                 <a:ea typeface="Trebuchet MS" pitchFamily="34" charset="-122"/>
                 <a:cs typeface="Trebuchet MS" pitchFamily="34" charset="-120"/>
               </a:rPr>
-              <a:t>trustful</a:t>
+              <a:t>trusted</a:t>
             </a:r>
             <a:endParaRPr lang="en-US" sz="1200" dirty="0"/>
           </a:p>
@@ -35987,7 +36389,7 @@
                 <a:ea typeface="Trebuchet MS" pitchFamily="34" charset="-122"/>
                 <a:cs typeface="Trebuchet MS" pitchFamily="34" charset="-120"/>
               </a:rPr>
-              <a:t>trusted</a:t>
+              <a:t>trusting</a:t>
             </a:r>
             <a:endParaRPr lang="en-US" sz="1200" dirty="0"/>
           </a:p>
@@ -36053,7 +36455,7 @@
                 <a:ea typeface="Trebuchet MS" pitchFamily="34" charset="-122"/>
                 <a:cs typeface="Trebuchet MS" pitchFamily="34" charset="-120"/>
               </a:rPr>
-              <a:t>trusting</a:t>
+              <a:t>trustful</a:t>
             </a:r>
             <a:endParaRPr lang="en-US" sz="1200" dirty="0"/>
           </a:p>
@@ -36119,7 +36521,7 @@
                 <a:ea typeface="Trebuchet MS" pitchFamily="34" charset="-122"/>
                 <a:cs typeface="Trebuchet MS" pitchFamily="34" charset="-120"/>
               </a:rPr>
-              <a:t>untrustworthy</a:t>
+              <a:t>distrustful</a:t>
             </a:r>
             <a:endParaRPr lang="en-US" sz="1200" dirty="0"/>
           </a:p>
@@ -36185,7 +36587,7 @@
                 <a:ea typeface="Trebuchet MS" pitchFamily="34" charset="-122"/>
                 <a:cs typeface="Trebuchet MS" pitchFamily="34" charset="-120"/>
               </a:rPr>
-              <a:t>distrustful</a:t>
+              <a:t>trustingly</a:t>
             </a:r>
             <a:endParaRPr lang="en-US" sz="1200" dirty="0"/>
           </a:p>
@@ -37373,7 +37775,7 @@
                 <a:ea typeface="Calibri" pitchFamily="34" charset="-122"/>
                 <a:cs typeface="Calibri" pitchFamily="34" charset="-120"/>
               </a:rPr>
-              <a:t>1.  The word 'trustworthy' contains the root 'trust'.</a:t>
+              <a:t>1.  The root 'trust' comes from a Greek word meaning to see.</a:t>
             </a:r>
             <a:endParaRPr lang="en-US" sz="1300" dirty="0"/>
           </a:p>
@@ -37396,11 +37798,11 @@
             </a:avLst>
           </a:prstGeom>
           <a:solidFill>
-            <a:srgbClr val="DCFCE7"/>
-          </a:solidFill>
-          <a:ln w="12700">
-            <a:solidFill>
-              <a:srgbClr val="16A34A"/>
+            <a:srgbClr val="FEE2E2"/>
+          </a:solidFill>
+          <a:ln w="12700">
+            <a:solidFill>
+              <a:srgbClr val="DC2626"/>
             </a:solidFill>
             <a:prstDash val="solid"/>
           </a:ln>
@@ -37433,13 +37835,13 @@
             <a:r>
               <a:rPr lang="en-US" sz="1100" b="1" dirty="0">
                 <a:solidFill>
-                  <a:srgbClr val="16A34A"/>
+                  <a:srgbClr val="DC2626"/>
                 </a:solidFill>
                 <a:latin typeface="Trebuchet MS" pitchFamily="34" charset="0"/>
                 <a:ea typeface="Trebuchet MS" pitchFamily="34" charset="-122"/>
                 <a:cs typeface="Trebuchet MS" pitchFamily="34" charset="-120"/>
               </a:rPr>
-              <a:t>TRUE</a:t>
+              <a:t>FALSE</a:t>
             </a:r>
             <a:endParaRPr lang="en-US" sz="1100" dirty="0"/>
           </a:p>
@@ -37512,7 +37914,7 @@
                 <a:ea typeface="Calibri" pitchFamily="34" charset="-122"/>
                 <a:cs typeface="Calibri" pitchFamily="34" charset="-120"/>
               </a:rPr>
-              <a:t>2.  The prefix 'dis' in 'distrust' means 'again'.</a:t>
+              <a:t>2.  The suffix '-ful' in 'trustful' means full of or having a quality.</a:t>
             </a:r>
             <a:endParaRPr lang="en-US" sz="1300" dirty="0"/>
           </a:p>
@@ -37535,11 +37937,11 @@
             </a:avLst>
           </a:prstGeom>
           <a:solidFill>
-            <a:srgbClr val="FEE2E2"/>
-          </a:solidFill>
-          <a:ln w="12700">
-            <a:solidFill>
-              <a:srgbClr val="DC2626"/>
+            <a:srgbClr val="DCFCE7"/>
+          </a:solidFill>
+          <a:ln w="12700">
+            <a:solidFill>
+              <a:srgbClr val="16A34A"/>
             </a:solidFill>
             <a:prstDash val="solid"/>
           </a:ln>
@@ -37572,13 +37974,13 @@
             <a:r>
               <a:rPr lang="en-US" sz="1100" b="1" dirty="0">
                 <a:solidFill>
-                  <a:srgbClr val="DC2626"/>
+                  <a:srgbClr val="16A34A"/>
                 </a:solidFill>
                 <a:latin typeface="Trebuchet MS" pitchFamily="34" charset="0"/>
                 <a:ea typeface="Trebuchet MS" pitchFamily="34" charset="-122"/>
                 <a:cs typeface="Trebuchet MS" pitchFamily="34" charset="-120"/>
               </a:rPr>
-              <a:t>FALSE</a:t>
+              <a:t>TRUE</a:t>
             </a:r>
             <a:endParaRPr lang="en-US" sz="1100" dirty="0"/>
           </a:p>
@@ -37651,7 +38053,7 @@
                 <a:ea typeface="Calibri" pitchFamily="34" charset="-122"/>
                 <a:cs typeface="Calibri" pitchFamily="34" charset="-120"/>
               </a:rPr>
-              <a:t>3.  'Untrustworthy' means a person who cannot be relied on or believed.</a:t>
+              <a:t>3.  'Mistrustful' and 'trusted' contain exactly the same number of morphemes.</a:t>
             </a:r>
             <a:endParaRPr lang="en-US" sz="1300" dirty="0"/>
           </a:p>
@@ -37674,11 +38076,11 @@
             </a:avLst>
           </a:prstGeom>
           <a:solidFill>
-            <a:srgbClr val="DCFCE7"/>
-          </a:solidFill>
-          <a:ln w="12700">
-            <a:solidFill>
-              <a:srgbClr val="16A34A"/>
+            <a:srgbClr val="FEE2E2"/>
+          </a:solidFill>
+          <a:ln w="12700">
+            <a:solidFill>
+              <a:srgbClr val="DC2626"/>
             </a:solidFill>
             <a:prstDash val="solid"/>
           </a:ln>
@@ -37711,13 +38113,13 @@
             <a:r>
               <a:rPr lang="en-US" sz="1100" b="1" dirty="0">
                 <a:solidFill>
-                  <a:srgbClr val="16A34A"/>
+                  <a:srgbClr val="DC2626"/>
                 </a:solidFill>
                 <a:latin typeface="Trebuchet MS" pitchFamily="34" charset="0"/>
                 <a:ea typeface="Trebuchet MS" pitchFamily="34" charset="-122"/>
                 <a:cs typeface="Trebuchet MS" pitchFamily="34" charset="-120"/>
               </a:rPr>
-              <a:t>TRUE</a:t>
+              <a:t>FALSE</a:t>
             </a:r>
             <a:endParaRPr lang="en-US" sz="1100" dirty="0"/>
           </a:p>
@@ -37790,7 +38192,7 @@
                 <a:ea typeface="Calibri" pitchFamily="34" charset="-122"/>
                 <a:cs typeface="Calibri" pitchFamily="34" charset="-120"/>
               </a:rPr>
-              <a:t>4.  The root 'trust' means to believe in or rely on someone.</a:t>
+              <a:t>4.  The prefix 'dis' in 'distrust' means the opposite — to not trust someone.</a:t>
             </a:r>
             <a:endParaRPr lang="en-US" sz="1300" dirty="0"/>
           </a:p>
@@ -37929,7 +38331,7 @@
                 <a:ea typeface="Calibri" pitchFamily="34" charset="-122"/>
                 <a:cs typeface="Calibri" pitchFamily="34" charset="-120"/>
               </a:rPr>
-              <a:t>5.  The word 'mistrust' means to trust someone very much.</a:t>
+              <a:t>5.  'Trustworthy' is made up of more than one morpheme.</a:t>
             </a:r>
             <a:endParaRPr lang="en-US" sz="1300" dirty="0"/>
           </a:p>
@@ -37952,11 +38354,11 @@
             </a:avLst>
           </a:prstGeom>
           <a:solidFill>
-            <a:srgbClr val="FEE2E2"/>
-          </a:solidFill>
-          <a:ln w="12700">
-            <a:solidFill>
-              <a:srgbClr val="DC2626"/>
+            <a:srgbClr val="DCFCE7"/>
+          </a:solidFill>
+          <a:ln w="12700">
+            <a:solidFill>
+              <a:srgbClr val="16A34A"/>
             </a:solidFill>
             <a:prstDash val="solid"/>
           </a:ln>
@@ -37989,13 +38391,13 @@
             <a:r>
               <a:rPr lang="en-US" sz="1100" b="1" dirty="0">
                 <a:solidFill>
-                  <a:srgbClr val="DC2626"/>
+                  <a:srgbClr val="16A34A"/>
                 </a:solidFill>
                 <a:latin typeface="Trebuchet MS" pitchFamily="34" charset="0"/>
                 <a:ea typeface="Trebuchet MS" pitchFamily="34" charset="-122"/>
                 <a:cs typeface="Trebuchet MS" pitchFamily="34" charset="-120"/>
               </a:rPr>
-              <a:t>FALSE</a:t>
+              <a:t>TRUE</a:t>
             </a:r>
             <a:endParaRPr lang="en-US" sz="1100" dirty="0"/>
           </a:p>
@@ -38568,7 +38970,7 @@
                 <a:ea typeface="Trebuchet MS" pitchFamily="34" charset="-122"/>
                 <a:cs typeface="Trebuchet MS" pitchFamily="34" charset="-120"/>
               </a:rPr>
-              <a:t>distrust</a:t>
+              <a:t>trustworthy</a:t>
             </a:r>
             <a:endParaRPr lang="en-US" sz="1300" dirty="0"/>
           </a:p>
@@ -38634,7 +39036,7 @@
                 <a:ea typeface="Trebuchet MS" pitchFamily="34" charset="-122"/>
                 <a:cs typeface="Trebuchet MS" pitchFamily="34" charset="-120"/>
               </a:rPr>
-              <a:t>mistrust</a:t>
+              <a:t>distrust</a:t>
             </a:r>
             <a:endParaRPr lang="en-US" sz="1300" dirty="0"/>
           </a:p>
@@ -38700,7 +39102,7 @@
                 <a:ea typeface="Trebuchet MS" pitchFamily="34" charset="-122"/>
                 <a:cs typeface="Trebuchet MS" pitchFamily="34" charset="-120"/>
               </a:rPr>
-              <a:t>trustworthy</a:t>
+              <a:t>mistrust</a:t>
             </a:r>
             <a:endParaRPr lang="en-US" sz="1300" dirty="0"/>
           </a:p>
@@ -38766,7 +39168,7 @@
                 <a:ea typeface="Trebuchet MS" pitchFamily="34" charset="-122"/>
                 <a:cs typeface="Trebuchet MS" pitchFamily="34" charset="-120"/>
               </a:rPr>
-              <a:t>trustful</a:t>
+              <a:t>trusted</a:t>
             </a:r>
             <a:endParaRPr lang="en-US" sz="1300" dirty="0"/>
           </a:p>
@@ -38832,7 +39234,7 @@
                 <a:ea typeface="Trebuchet MS" pitchFamily="34" charset="-122"/>
                 <a:cs typeface="Trebuchet MS" pitchFamily="34" charset="-120"/>
               </a:rPr>
-              <a:t>trusted</a:t>
+              <a:t>trusting</a:t>
             </a:r>
             <a:endParaRPr lang="en-US" sz="1300" dirty="0"/>
           </a:p>
@@ -38898,7 +39300,7 @@
                 <a:ea typeface="Trebuchet MS" pitchFamily="34" charset="-122"/>
                 <a:cs typeface="Trebuchet MS" pitchFamily="34" charset="-120"/>
               </a:rPr>
-              <a:t>trusting</a:t>
+              <a:t>trustful</a:t>
             </a:r>
             <a:endParaRPr lang="en-US" sz="1300" dirty="0"/>
           </a:p>
@@ -38964,7 +39366,7 @@
                 <a:ea typeface="Trebuchet MS" pitchFamily="34" charset="-122"/>
                 <a:cs typeface="Trebuchet MS" pitchFamily="34" charset="-120"/>
               </a:rPr>
-              <a:t>untrustworthy</a:t>
+              <a:t>distrustful</a:t>
             </a:r>
             <a:endParaRPr lang="en-US" sz="1300" dirty="0"/>
           </a:p>
@@ -40297,7 +40699,7 @@
                 <a:ea typeface="Trebuchet MS" pitchFamily="34" charset="-122"/>
                 <a:cs typeface="Trebuchet MS" pitchFamily="34" charset="-120"/>
               </a:rPr>
-              <a:t>-s</a:t>
+              <a:t>-ingly</a:t>
             </a:r>
             <a:endParaRPr lang="en-US" sz="1300" dirty="0"/>
           </a:p>
@@ -40738,7 +41140,7 @@
                 <a:ea typeface="Trebuchet MS" pitchFamily="34" charset="-122"/>
                 <a:cs typeface="Trebuchet MS" pitchFamily="34" charset="-120"/>
               </a:rPr>
-              <a:t>distrust</a:t>
+              <a:t>trustworthy</a:t>
             </a:r>
             <a:endParaRPr lang="en-US" sz="1400" dirty="0"/>
           </a:p>
@@ -41142,7 +41544,7 @@
                 <a:ea typeface="Trebuchet MS" pitchFamily="34" charset="-122"/>
                 <a:cs typeface="Trebuchet MS" pitchFamily="34" charset="-120"/>
               </a:rPr>
-              <a:t>distrust</a:t>
+              <a:t>trustworthy</a:t>
             </a:r>
             <a:endParaRPr lang="en-US" sz="1200" dirty="0"/>
           </a:p>
@@ -41208,7 +41610,7 @@
                 <a:ea typeface="Calibri" pitchFamily="34" charset="-122"/>
                 <a:cs typeface="Calibri" pitchFamily="34" charset="-120"/>
               </a:rPr>
-              <a:t>A feeling that you cannot believe or rely on someone.</a:t>
+              <a:t>Someone who can be trusted to do the right thing and keep their promises.</a:t>
             </a:r>
             <a:endParaRPr lang="en-US" sz="1200" dirty="0"/>
           </a:p>
@@ -41281,7 +41683,7 @@
                 <a:ea typeface="Trebuchet MS" pitchFamily="34" charset="-122"/>
                 <a:cs typeface="Trebuchet MS" pitchFamily="34" charset="-120"/>
               </a:rPr>
-              <a:t>mistrust</a:t>
+              <a:t>distrust</a:t>
             </a:r>
             <a:endParaRPr lang="en-US" sz="1200" dirty="0"/>
           </a:p>
@@ -41347,7 +41749,7 @@
                 <a:ea typeface="Calibri" pitchFamily="34" charset="-122"/>
                 <a:cs typeface="Calibri" pitchFamily="34" charset="-120"/>
               </a:rPr>
-              <a:t>Someone who is reliable and can be trusted to do the right thing.</a:t>
+              <a:t>A feeling of doubt about whether someone can be trusted.</a:t>
             </a:r>
             <a:endParaRPr lang="en-US" sz="1200" dirty="0"/>
           </a:p>
@@ -41420,7 +41822,7 @@
                 <a:ea typeface="Trebuchet MS" pitchFamily="34" charset="-122"/>
                 <a:cs typeface="Trebuchet MS" pitchFamily="34" charset="-120"/>
               </a:rPr>
-              <a:t>trustworthy</a:t>
+              <a:t>mistrust</a:t>
             </a:r>
             <a:endParaRPr lang="en-US" sz="1200" dirty="0"/>
           </a:p>
@@ -41486,7 +41888,7 @@
                 <a:ea typeface="Calibri" pitchFamily="34" charset="-122"/>
                 <a:cs typeface="Calibri" pitchFamily="34" charset="-120"/>
               </a:rPr>
-              <a:t>Believing that people are honest and will not let you down.</a:t>
+              <a:t>Having a lot of trust in other people.</a:t>
             </a:r>
             <a:endParaRPr lang="en-US" sz="1200" dirty="0"/>
           </a:p>
@@ -41559,7 +41961,7 @@
                 <a:ea typeface="Trebuchet MS" pitchFamily="34" charset="-122"/>
                 <a:cs typeface="Trebuchet MS" pitchFamily="34" charset="-120"/>
               </a:rPr>
-              <a:t>trustful</a:t>
+              <a:t>trusted</a:t>
             </a:r>
             <a:endParaRPr lang="en-US" sz="1200" dirty="0"/>
           </a:p>
@@ -41625,7 +42027,7 @@
                 <a:ea typeface="Calibri" pitchFamily="34" charset="-122"/>
                 <a:cs typeface="Calibri" pitchFamily="34" charset="-120"/>
               </a:rPr>
-              <a:t>Being ready to trust others easily and believe they are good.</a:t>
+              <a:t>When someone has shown they can be relied on and believed.</a:t>
             </a:r>
             <a:endParaRPr lang="en-US" sz="1200" dirty="0"/>
           </a:p>
@@ -41698,7 +42100,7 @@
                 <a:ea typeface="Trebuchet MS" pitchFamily="34" charset="-122"/>
                 <a:cs typeface="Trebuchet MS" pitchFamily="34" charset="-120"/>
               </a:rPr>
-              <a:t>trusted</a:t>
+              <a:t>trusting</a:t>
             </a:r>
             <a:endParaRPr lang="en-US" sz="1200" dirty="0"/>
           </a:p>
@@ -41764,7 +42166,7 @@
                 <a:ea typeface="Calibri" pitchFamily="34" charset="-122"/>
                 <a:cs typeface="Calibri" pitchFamily="34" charset="-120"/>
               </a:rPr>
-              <a:t>Something or someone that has been shown to be reliable and honest.</a:t>
+              <a:t>Being willing to believe that others are good and honest.</a:t>
             </a:r>
             <a:endParaRPr lang="en-US" sz="1200" dirty="0"/>
           </a:p>
@@ -41837,7 +42239,7 @@
                 <a:ea typeface="Trebuchet MS" pitchFamily="34" charset="-122"/>
                 <a:cs typeface="Trebuchet MS" pitchFamily="34" charset="-120"/>
               </a:rPr>
-              <a:t>trusting</a:t>
+              <a:t>trustful</a:t>
             </a:r>
             <a:endParaRPr lang="en-US" sz="1200" dirty="0"/>
           </a:p>
@@ -41903,7 +42305,7 @@
                 <a:ea typeface="Calibri" pitchFamily="34" charset="-122"/>
                 <a:cs typeface="Calibri" pitchFamily="34" charset="-120"/>
               </a:rPr>
-              <a:t>Someone you cannot rely on because they may lie or let you down.</a:t>
+              <a:t>Feeling suspicious or not sure if someone can be trusted.</a:t>
             </a:r>
             <a:endParaRPr lang="en-US" sz="1200" dirty="0"/>
           </a:p>
@@ -41976,7 +42378,7 @@
                 <a:ea typeface="Trebuchet MS" pitchFamily="34" charset="-122"/>
                 <a:cs typeface="Trebuchet MS" pitchFamily="34" charset="-120"/>
               </a:rPr>
-              <a:t>untrustworthy</a:t>
+              <a:t>distrustful</a:t>
             </a:r>
             <a:endParaRPr lang="en-US" sz="1200" dirty="0"/>
           </a:p>
@@ -42042,7 +42444,7 @@
                 <a:ea typeface="Calibri" pitchFamily="34" charset="-122"/>
                 <a:cs typeface="Calibri" pitchFamily="34" charset="-120"/>
               </a:rPr>
-              <a:t>When you are not sure if someone is honest or safe to rely on.</a:t>
+              <a:t>When you do not trust someone or feel unsure about whether they are honest.</a:t>
             </a:r>
             <a:endParaRPr lang="en-US" sz="1200" dirty="0"/>
           </a:p>
@@ -42537,7 +42939,7 @@
                 <a:ea typeface="Calibri" pitchFamily="34" charset="-122"/>
                 <a:cs typeface="Calibri" pitchFamily="34" charset="-120"/>
               </a:rPr>
-              <a:t>She was a trustworthy friend who always kept her promises.</a:t>
+              <a:t>It is important to be trustworthy so that your friends and family know they can rely on you.</a:t>
             </a:r>
             <a:endParaRPr lang="en-US" sz="1500" dirty="0"/>
           </a:p>
@@ -42701,7 +43103,7 @@
                 <a:ea typeface="Calibri" pitchFamily="34" charset="-122"/>
                 <a:cs typeface="Calibri" pitchFamily="34" charset="-120"/>
               </a:rPr>
-              <a:t>He began to distrust his teammate after he found out the truth.</a:t>
+              <a:t>She felt a sense of distrust when the stranger refused to answer her simple questions.</a:t>
             </a:r>
             <a:endParaRPr lang="en-US" sz="1500" dirty="0"/>
           </a:p>
@@ -42865,7 +43267,7 @@
                 <a:ea typeface="Calibri" pitchFamily="34" charset="-122"/>
                 <a:cs typeface="Calibri" pitchFamily="34" charset="-120"/>
               </a:rPr>
-              <a:t>The children trusted their teacher to help them solve the problem.</a:t>
+              <a:t>The little dog looked up trustingly at its owner, wagging its tail and waiting patiently.</a:t>
             </a:r>
             <a:endParaRPr lang="en-US" sz="1500" dirty="0"/>
           </a:p>
